--- a/Workshops_&_Learning_Events_Planner.pptx
+++ b/Workshops_&_Learning_Events_Planner.pptx
@@ -5,7 +5,7 @@
     <p:sldMasterId id="2147483648" r:id="rId1"/>
   </p:sldMasterIdLst>
   <p:notesMasterIdLst>
-    <p:notesMasterId r:id="rId26"/>
+    <p:notesMasterId r:id="rId34"/>
   </p:notesMasterIdLst>
   <p:sldIdLst>
     <p:sldId id="256" r:id="rId2"/>
@@ -27,19 +27,27 @@
     <p:sldId id="337" r:id="rId18"/>
     <p:sldId id="338" r:id="rId19"/>
     <p:sldId id="340" r:id="rId20"/>
-    <p:sldId id="311" r:id="rId21"/>
-    <p:sldId id="318" r:id="rId22"/>
-    <p:sldId id="319" r:id="rId23"/>
-    <p:sldId id="320" r:id="rId24"/>
-    <p:sldId id="279" r:id="rId25"/>
+    <p:sldId id="341" r:id="rId21"/>
+    <p:sldId id="342" r:id="rId22"/>
+    <p:sldId id="343" r:id="rId23"/>
+    <p:sldId id="344" r:id="rId24"/>
+    <p:sldId id="345" r:id="rId25"/>
+    <p:sldId id="346" r:id="rId26"/>
+    <p:sldId id="347" r:id="rId27"/>
+    <p:sldId id="348" r:id="rId28"/>
+    <p:sldId id="311" r:id="rId29"/>
+    <p:sldId id="318" r:id="rId30"/>
+    <p:sldId id="319" r:id="rId31"/>
+    <p:sldId id="320" r:id="rId32"/>
+    <p:sldId id="279" r:id="rId33"/>
   </p:sldIdLst>
   <p:sldSz cx="18288000" cy="10287000"/>
   <p:notesSz cx="6858000" cy="9144000"/>
   <p:embeddedFontLst>
     <p:embeddedFont>
       <p:font typeface="Malgun Gothic" panose="020B0503020000020004" pitchFamily="34" charset="-127"/>
-      <p:regular r:id="rId27"/>
-      <p:bold r:id="rId28"/>
+      <p:regular r:id="rId35"/>
+      <p:bold r:id="rId36"/>
     </p:embeddedFont>
   </p:embeddedFontLst>
   <p:defaultTextStyle>
@@ -1211,7 +1219,7 @@
             </a:pPr>
             <a:fld id="{00000000-1234-1234-1234-123412341234}" type="slidenum">
               <a:rPr lang="en-US"/>
-              <a:t>24</a:t>
+              <a:t>32</a:t>
             </a:fld>
             <a:endParaRPr/>
           </a:p>
@@ -9567,7 +9575,7 @@
         <p:spPr>
           <a:xfrm>
             <a:off x="1447800" y="2446705"/>
-            <a:ext cx="0" cy="6125795"/>
+            <a:ext cx="0" cy="5237008"/>
           </a:xfrm>
           <a:prstGeom prst="straightConnector1">
             <a:avLst/>
@@ -9599,7 +9607,7 @@
         <p:spPr>
           <a:xfrm>
             <a:off x="1866900" y="2420734"/>
-            <a:ext cx="14554200" cy="6370975"/>
+            <a:ext cx="14554200" cy="5262979"/>
           </a:xfrm>
           <a:prstGeom prst="rect">
             <a:avLst/>
@@ -9622,7 +9630,7 @@
                   <a:schemeClr val="bg1"/>
                 </a:solidFill>
               </a:rPr>
-              <a:t>Role-Based Access Control (RBAC): Established distinct privileges where administrators can manage catalog inventory, while customers can register, search, borrow, and return items.</a:t>
+              <a:t>User Authentication &amp; Role Management: Implemented secure login and registration modules with strict input validations and segregated permissions for standard users and administrators.</a:t>
             </a:r>
             <a:endParaRPr lang="ar-EG" sz="2400" dirty="0">
               <a:solidFill>
@@ -9652,23 +9660,7 @@
                   <a:schemeClr val="bg1"/>
                 </a:solidFill>
               </a:rPr>
-              <a:t>Double Login Prevention &amp; State Management: Implemented active session checks (</a:t>
-            </a:r>
-            <a:r>
-              <a:rPr lang="en-US" sz="2400" dirty="0" err="1">
-                <a:solidFill>
-                  <a:schemeClr val="bg1"/>
-                </a:solidFill>
-              </a:rPr>
-              <a:t>current_user</a:t>
-            </a:r>
-            <a:r>
-              <a:rPr lang="en-US" sz="2400" dirty="0">
-                <a:solidFill>
-                  <a:schemeClr val="bg1"/>
-                </a:solidFill>
-              </a:rPr>
-              <a:t>) to prevent concurrent multiple logins on the same terminal interface.</a:t>
+              <a:t>Event Management System: Developed core operations for administrators to add, update seats, modify pricing, and remove events, coupled with dynamic filtering and keyword search for users.</a:t>
             </a:r>
             <a:endParaRPr lang="ar-EG" sz="2400" dirty="0">
               <a:solidFill>
@@ -9698,45 +9690,7 @@
                   <a:schemeClr val="bg1"/>
                 </a:solidFill>
               </a:rPr>
-              <a:t>Dynamic Item Borrowing &amp; Return Tracking: Built secure lending workflows that link borrowed items directly to user profiles with strict validation preventing users from returning items they did not borrow.</a:t>
-            </a:r>
-            <a:endParaRPr lang="ar-EG" sz="2400" dirty="0">
-              <a:solidFill>
-                <a:schemeClr val="bg1"/>
-              </a:solidFill>
-            </a:endParaRPr>
-          </a:p>
-          <a:p>
-            <a:pPr marL="342900" indent="-342900">
-              <a:buFont typeface="Arial" panose="020B0604020202020204" pitchFamily="34" charset="0"/>
-              <a:buChar char="•"/>
-            </a:pPr>
-            <a:endParaRPr lang="ar-EG" sz="2400" dirty="0">
-              <a:solidFill>
-                <a:schemeClr val="bg1"/>
-              </a:solidFill>
-            </a:endParaRPr>
-          </a:p>
-          <a:p>
-            <a:pPr marL="342900" indent="-342900">
-              <a:buFont typeface="Arial" panose="020B0604020202020204" pitchFamily="34" charset="0"/>
-              <a:buChar char="•"/>
-            </a:pPr>
-            <a:r>
-              <a:rPr lang="en-US" sz="2400" b="1" dirty="0">
-                <a:solidFill>
-                  <a:schemeClr val="bg1"/>
-                </a:solidFill>
-              </a:rPr>
-              <a:t>Automated Late Fee Calculation:</a:t>
-            </a:r>
-            <a:r>
-              <a:rPr lang="en-US" sz="2400" dirty="0">
-                <a:solidFill>
-                  <a:schemeClr val="bg1"/>
-                </a:solidFill>
-              </a:rPr>
-              <a:t> Integrated a closure-based fine engine that calculates overdue charges automatically at 5 EGP per day past the 7-day borrowing limit. </a:t>
+              <a:t>Personalized Learning Plan Integration: Created a dedicated plan builder enabling users to add or remove workshops, automatically update available seat counts, and maintain state persistence.</a:t>
             </a:r>
             <a:endParaRPr lang="ar-EG" sz="2400" dirty="0">
               <a:solidFill>
@@ -9766,7 +9720,7 @@
                   <a:schemeClr val="bg1"/>
                 </a:solidFill>
               </a:rPr>
-              <a:t>Robust Input Validation &amp; Error Handling: Designed multi-try validation loops using regular expressions (re) for emails, passwords, and names to protect application integrity and prevent crashes.</a:t>
+              <a:t>Custom Merge Sort Algorithm: Built a manual Divide-and-Conquer sorting mechanism to order workshop listings efficiently by price or rating without relying on built-in language shortcuts. </a:t>
             </a:r>
             <a:endParaRPr lang="ar-EG" sz="2400" dirty="0">
               <a:solidFill>
@@ -9796,7 +9750,7 @@
                   <a:schemeClr val="bg1"/>
                 </a:solidFill>
               </a:rPr>
-              <a:t>Persistent JSON Database Integration: Developed automated state synchronization that saves and loads all user registries, item statuses, and system changes seamlessly via JSON storage.</a:t>
+              <a:t>Financial &amp; Cost Summary Calculations: Integrated automated summary features to compute cumulative event fees, total learning hours, and transportation costs in a structured report. </a:t>
             </a:r>
             <a:endParaRPr lang="ar-EG" sz="2400" dirty="0">
               <a:solidFill>
@@ -9999,8 +9953,8 @@
         </p:blipFill>
         <p:spPr>
           <a:xfrm>
-            <a:off x="4720240" y="1340495"/>
-            <a:ext cx="8839199" cy="7606010"/>
+            <a:off x="3886200" y="1340495"/>
+            <a:ext cx="10210800" cy="7606010"/>
           </a:xfrm>
           <a:prstGeom prst="rect">
             <a:avLst/>
@@ -10042,7 +9996,7 @@
         </p:nvSpPr>
         <p:spPr>
           <a:xfrm>
-            <a:off x="3272440" y="266700"/>
+            <a:off x="3886200" y="190500"/>
             <a:ext cx="2895600" cy="1015663"/>
           </a:xfrm>
           <a:prstGeom prst="rect">
@@ -10273,8 +10227,8 @@
         </p:blipFill>
         <p:spPr>
           <a:xfrm>
-            <a:off x="4400943" y="1296144"/>
-            <a:ext cx="9486114" cy="7694712"/>
+            <a:off x="3886200" y="1296144"/>
+            <a:ext cx="10058400" cy="7694712"/>
           </a:xfrm>
           <a:prstGeom prst="rect">
             <a:avLst/>
@@ -10316,8 +10270,8 @@
         </p:nvSpPr>
         <p:spPr>
           <a:xfrm>
-            <a:off x="3272440" y="266701"/>
-            <a:ext cx="2594960" cy="1015663"/>
+            <a:off x="3886200" y="280481"/>
+            <a:ext cx="3737960" cy="1015663"/>
           </a:xfrm>
           <a:prstGeom prst="rect">
             <a:avLst/>
@@ -10342,7 +10296,7 @@
                 <a:ea typeface="Calibri"/>
                 <a:cs typeface="Calibri"/>
               </a:rPr>
-              <a:t>Login</a:t>
+              <a:t>User Login</a:t>
             </a:r>
             <a:endParaRPr lang="en-US" sz="6600" dirty="0">
               <a:solidFill>
@@ -10547,8 +10501,8 @@
         </p:blipFill>
         <p:spPr>
           <a:xfrm>
-            <a:off x="3332808" y="1485900"/>
-            <a:ext cx="11622382" cy="7606009"/>
+            <a:off x="3332808" y="1594135"/>
+            <a:ext cx="11622382" cy="7389539"/>
           </a:xfrm>
           <a:prstGeom prst="rect">
             <a:avLst/>
@@ -10591,7 +10545,7 @@
         <p:spPr>
           <a:xfrm>
             <a:off x="3272440" y="266700"/>
-            <a:ext cx="4042760" cy="1015663"/>
+            <a:ext cx="5109560" cy="1015663"/>
           </a:xfrm>
           <a:prstGeom prst="rect">
             <a:avLst/>
@@ -10616,7 +10570,7 @@
                 <a:ea typeface="Calibri"/>
                 <a:cs typeface="Calibri"/>
               </a:rPr>
-              <a:t>Add item</a:t>
+              <a:t>Display Events</a:t>
             </a:r>
             <a:endParaRPr lang="en-US" sz="6600" dirty="0">
               <a:solidFill>
@@ -10821,8 +10775,8 @@
         </p:blipFill>
         <p:spPr>
           <a:xfrm>
-            <a:off x="684329" y="2316757"/>
-            <a:ext cx="16919342" cy="5653485"/>
+            <a:off x="3657600" y="1731789"/>
+            <a:ext cx="11368217" cy="7069311"/>
           </a:xfrm>
           <a:prstGeom prst="rect">
             <a:avLst/>
@@ -10864,7 +10818,7 @@
         </p:nvSpPr>
         <p:spPr>
           <a:xfrm>
-            <a:off x="3272440" y="266700"/>
+            <a:off x="3657600" y="342900"/>
             <a:ext cx="4271360" cy="1015663"/>
           </a:xfrm>
           <a:prstGeom prst="rect">
@@ -10889,7 +10843,7 @@
                 <a:ea typeface="Calibri"/>
                 <a:cs typeface="Calibri"/>
               </a:rPr>
-              <a:t>Borrow item</a:t>
+              <a:t>Filter Events</a:t>
             </a:r>
           </a:p>
         </p:txBody>
@@ -11087,8 +11041,8 @@
         </p:blipFill>
         <p:spPr>
           <a:xfrm>
-            <a:off x="3272440" y="1970953"/>
-            <a:ext cx="11743117" cy="6635903"/>
+            <a:off x="3421542" y="1714501"/>
+            <a:ext cx="11034343" cy="6892356"/>
           </a:xfrm>
           <a:prstGeom prst="rect">
             <a:avLst/>
@@ -11131,7 +11085,7 @@
         <p:spPr>
           <a:xfrm>
             <a:off x="3272440" y="266700"/>
-            <a:ext cx="4271360" cy="1015663"/>
+            <a:ext cx="7319360" cy="1015663"/>
           </a:xfrm>
           <a:prstGeom prst="rect">
             <a:avLst/>
@@ -11155,7 +11109,7 @@
                 <a:ea typeface="Calibri"/>
                 <a:cs typeface="Calibri"/>
               </a:rPr>
-              <a:t>Return item</a:t>
+              <a:t>Search for an Events</a:t>
             </a:r>
           </a:p>
         </p:txBody>
@@ -11353,8 +11307,8 @@
         </p:blipFill>
         <p:spPr>
           <a:xfrm>
-            <a:off x="495300" y="2781300"/>
-            <a:ext cx="17297400" cy="4724400"/>
+            <a:off x="3272440" y="1359547"/>
+            <a:ext cx="11356855" cy="7567905"/>
           </a:xfrm>
           <a:prstGeom prst="rect">
             <a:avLst/>
@@ -11397,7 +11351,7 @@
         <p:spPr>
           <a:xfrm>
             <a:off x="3272440" y="266700"/>
-            <a:ext cx="4957160" cy="1015663"/>
+            <a:ext cx="4042760" cy="1015663"/>
           </a:xfrm>
           <a:prstGeom prst="rect">
             <a:avLst/>
@@ -11421,7 +11375,7 @@
                 <a:ea typeface="Calibri"/>
                 <a:cs typeface="Calibri"/>
               </a:rPr>
-              <a:t>Search catalog</a:t>
+              <a:t>Sort Events</a:t>
             </a:r>
           </a:p>
         </p:txBody>
@@ -11619,8 +11573,8 @@
         </p:blipFill>
         <p:spPr>
           <a:xfrm>
-            <a:off x="984439" y="1823911"/>
-            <a:ext cx="16319121" cy="6639178"/>
+            <a:off x="2590800" y="1521411"/>
+            <a:ext cx="13792200" cy="7408820"/>
           </a:xfrm>
           <a:prstGeom prst="rect">
             <a:avLst/>
@@ -11662,8 +11616,8 @@
         </p:nvSpPr>
         <p:spPr>
           <a:xfrm>
-            <a:off x="3272440" y="266700"/>
-            <a:ext cx="5338160" cy="1015663"/>
+            <a:off x="2590800" y="341106"/>
+            <a:ext cx="6553200" cy="1015663"/>
           </a:xfrm>
           <a:prstGeom prst="rect">
             <a:avLst/>
@@ -11687,7 +11641,7 @@
                 <a:ea typeface="Calibri"/>
                 <a:cs typeface="Calibri"/>
               </a:rPr>
-              <a:t>Show reports</a:t>
+              <a:t>Add Event to plan</a:t>
             </a:r>
           </a:p>
         </p:txBody>
@@ -11885,8 +11839,8 @@
         </p:blipFill>
         <p:spPr>
           <a:xfrm>
-            <a:off x="984439" y="2382060"/>
-            <a:ext cx="16319121" cy="5522880"/>
+            <a:off x="3081543" y="1282363"/>
+            <a:ext cx="11472657" cy="7306857"/>
           </a:xfrm>
           <a:prstGeom prst="rect">
             <a:avLst/>
@@ -11928,8 +11882,8 @@
         </p:nvSpPr>
         <p:spPr>
           <a:xfrm>
-            <a:off x="3272440" y="266700"/>
-            <a:ext cx="5338160" cy="1015663"/>
+            <a:off x="3081542" y="266700"/>
+            <a:ext cx="8881857" cy="1015663"/>
           </a:xfrm>
           <a:prstGeom prst="rect">
             <a:avLst/>
@@ -11953,7 +11907,7 @@
                 <a:ea typeface="Calibri"/>
                 <a:cs typeface="Calibri"/>
               </a:rPr>
-              <a:t>Show reports</a:t>
+              <a:t>Remove Event from plan</a:t>
             </a:r>
           </a:p>
         </p:txBody>
@@ -13840,6 +13794,2134 @@
           <a:chExt cx="0" cy="0"/>
         </a:xfrm>
       </p:grpSpPr>
+      <p:pic>
+        <p:nvPicPr>
+          <p:cNvPr id="3" name="Picture 2">
+            <a:extLst>
+              <a:ext uri="{FF2B5EF4-FFF2-40B4-BE49-F238E27FC236}">
+                <a16:creationId xmlns:a16="http://schemas.microsoft.com/office/drawing/2014/main" id="{764C5F03-5284-1199-21E6-73F2DB8D3930}"/>
+              </a:ext>
+            </a:extLst>
+          </p:cNvPr>
+          <p:cNvPicPr>
+            <a:picLocks noChangeAspect="1"/>
+          </p:cNvPicPr>
+          <p:nvPr/>
+        </p:nvPicPr>
+        <p:blipFill>
+          <a:blip r:embed="rId2">
+            <a:extLst>
+              <a:ext uri="{28A0092B-C50C-407E-A947-70E740481C1C}">
+                <a14:useLocalDpi xmlns:a14="http://schemas.microsoft.com/office/drawing/2010/main" val="0"/>
+              </a:ext>
+            </a:extLst>
+          </a:blip>
+          <a:srcRect/>
+          <a:stretch/>
+        </p:blipFill>
+        <p:spPr>
+          <a:xfrm>
+            <a:off x="3272440" y="1485900"/>
+            <a:ext cx="11662760" cy="6908993"/>
+          </a:xfrm>
+          <a:prstGeom prst="rect">
+            <a:avLst/>
+          </a:prstGeom>
+          <a:ln>
+            <a:noFill/>
+          </a:ln>
+          <a:effectLst>
+            <a:outerShdw blurRad="149987" dist="250190" dir="8460000" algn="ctr">
+              <a:srgbClr val="000000">
+                <a:alpha val="28000"/>
+              </a:srgbClr>
+            </a:outerShdw>
+          </a:effectLst>
+          <a:scene3d>
+            <a:camera prst="orthographicFront">
+              <a:rot lat="0" lon="0" rev="0"/>
+            </a:camera>
+            <a:lightRig rig="contrasting" dir="t">
+              <a:rot lat="0" lon="0" rev="1500000"/>
+            </a:lightRig>
+          </a:scene3d>
+          <a:sp3d prstMaterial="metal">
+            <a:bevelT w="88900" h="88900"/>
+          </a:sp3d>
+        </p:spPr>
+      </p:pic>
+      <p:sp>
+        <p:nvSpPr>
+          <p:cNvPr id="4" name="Google Shape;39;p2">
+            <a:extLst>
+              <a:ext uri="{FF2B5EF4-FFF2-40B4-BE49-F238E27FC236}">
+                <a16:creationId xmlns:a16="http://schemas.microsoft.com/office/drawing/2014/main" id="{07D06A95-A758-DB7C-0369-E46BC4571108}"/>
+              </a:ext>
+            </a:extLst>
+          </p:cNvPr>
+          <p:cNvSpPr/>
+          <p:nvPr/>
+        </p:nvSpPr>
+        <p:spPr>
+          <a:xfrm>
+            <a:off x="3272440" y="266700"/>
+            <a:ext cx="5871560" cy="1015663"/>
+          </a:xfrm>
+          <a:prstGeom prst="rect">
+            <a:avLst/>
+          </a:prstGeom>
+          <a:noFill/>
+          <a:ln>
+            <a:noFill/>
+          </a:ln>
+        </p:spPr>
+        <p:txBody>
+          <a:bodyPr spcFirstLastPara="1" wrap="square" lIns="0" tIns="0" rIns="0" bIns="0" anchor="t" anchorCtr="0">
+            <a:spAutoFit/>
+          </a:bodyPr>
+          <a:lstStyle/>
+          <a:p>
+            <a:r>
+              <a:rPr lang="en-US" sz="6600" dirty="0">
+                <a:solidFill>
+                  <a:schemeClr val="lt1"/>
+                </a:solidFill>
+                <a:ea typeface="Calibri"/>
+                <a:cs typeface="Calibri"/>
+              </a:rPr>
+              <a:t>Display My Plan</a:t>
+            </a:r>
+          </a:p>
+        </p:txBody>
+      </p:sp>
+    </p:spTree>
+    <p:extLst>
+      <p:ext uri="{BB962C8B-B14F-4D97-AF65-F5344CB8AC3E}">
+        <p14:creationId xmlns:p14="http://schemas.microsoft.com/office/powerpoint/2010/main" val="3756122914"/>
+      </p:ext>
+    </p:extLst>
+  </p:cSld>
+  <p:clrMapOvr>
+    <a:masterClrMapping/>
+  </p:clrMapOvr>
+  <mc:AlternateContent xmlns:mc="http://schemas.openxmlformats.org/markup-compatibility/2006">
+    <mc:Choice xmlns:p14="http://schemas.microsoft.com/office/powerpoint/2010/main" Requires="p14">
+      <p:transition spd="med" p14:dur="700">
+        <p:fade/>
+      </p:transition>
+    </mc:Choice>
+    <mc:Fallback>
+      <p:transition spd="med">
+        <p:fade/>
+      </p:transition>
+    </mc:Fallback>
+  </mc:AlternateContent>
+  <p:timing>
+    <p:tnLst>
+      <p:par>
+        <p:cTn id="1" dur="indefinite" restart="never" nodeType="tmRoot">
+          <p:childTnLst>
+            <p:seq concurrent="1" nextAc="seek">
+              <p:cTn id="2" dur="indefinite" nodeType="mainSeq">
+                <p:childTnLst>
+                  <p:par>
+                    <p:cTn id="3" fill="hold">
+                      <p:stCondLst>
+                        <p:cond delay="indefinite"/>
+                        <p:cond evt="onBegin" delay="0">
+                          <p:tn val="2"/>
+                        </p:cond>
+                      </p:stCondLst>
+                      <p:childTnLst>
+                        <p:par>
+                          <p:cTn id="4" fill="hold">
+                            <p:stCondLst>
+                              <p:cond delay="0"/>
+                            </p:stCondLst>
+                            <p:childTnLst>
+                              <p:par>
+                                <p:cTn id="5" presetID="22" presetClass="entr" presetSubtype="8" fill="hold" grpId="0" nodeType="withEffect">
+                                  <p:stCondLst>
+                                    <p:cond delay="0"/>
+                                  </p:stCondLst>
+                                  <p:childTnLst>
+                                    <p:set>
+                                      <p:cBhvr>
+                                        <p:cTn id="6" dur="1" fill="hold">
+                                          <p:stCondLst>
+                                            <p:cond delay="0"/>
+                                          </p:stCondLst>
+                                        </p:cTn>
+                                        <p:tgtEl>
+                                          <p:spTgt spid="4"/>
+                                        </p:tgtEl>
+                                        <p:attrNameLst>
+                                          <p:attrName>style.visibility</p:attrName>
+                                        </p:attrNameLst>
+                                      </p:cBhvr>
+                                      <p:to>
+                                        <p:strVal val="visible"/>
+                                      </p:to>
+                                    </p:set>
+                                    <p:animEffect transition="in" filter="wipe(left)">
+                                      <p:cBhvr>
+                                        <p:cTn id="7" dur="950"/>
+                                        <p:tgtEl>
+                                          <p:spTgt spid="4"/>
+                                        </p:tgtEl>
+                                      </p:cBhvr>
+                                    </p:animEffect>
+                                  </p:childTnLst>
+                                </p:cTn>
+                              </p:par>
+                              <p:par>
+                                <p:cTn id="8" presetID="22" presetClass="entr" presetSubtype="8" fill="hold" nodeType="withEffect">
+                                  <p:stCondLst>
+                                    <p:cond delay="0"/>
+                                  </p:stCondLst>
+                                  <p:childTnLst>
+                                    <p:set>
+                                      <p:cBhvr>
+                                        <p:cTn id="9" dur="1" fill="hold">
+                                          <p:stCondLst>
+                                            <p:cond delay="0"/>
+                                          </p:stCondLst>
+                                        </p:cTn>
+                                        <p:tgtEl>
+                                          <p:spTgt spid="3"/>
+                                        </p:tgtEl>
+                                        <p:attrNameLst>
+                                          <p:attrName>style.visibility</p:attrName>
+                                        </p:attrNameLst>
+                                      </p:cBhvr>
+                                      <p:to>
+                                        <p:strVal val="visible"/>
+                                      </p:to>
+                                    </p:set>
+                                    <p:animEffect transition="in" filter="wipe(left)">
+                                      <p:cBhvr>
+                                        <p:cTn id="10" dur="1000"/>
+                                        <p:tgtEl>
+                                          <p:spTgt spid="3"/>
+                                        </p:tgtEl>
+                                      </p:cBhvr>
+                                    </p:animEffect>
+                                  </p:childTnLst>
+                                </p:cTn>
+                              </p:par>
+                            </p:childTnLst>
+                          </p:cTn>
+                        </p:par>
+                      </p:childTnLst>
+                    </p:cTn>
+                  </p:par>
+                </p:childTnLst>
+              </p:cTn>
+              <p:prevCondLst>
+                <p:cond evt="onPrev" delay="0">
+                  <p:tgtEl>
+                    <p:sldTgt/>
+                  </p:tgtEl>
+                </p:cond>
+              </p:prevCondLst>
+              <p:nextCondLst>
+                <p:cond evt="onNext" delay="0">
+                  <p:tgtEl>
+                    <p:sldTgt/>
+                  </p:tgtEl>
+                </p:cond>
+              </p:nextCondLst>
+            </p:seq>
+          </p:childTnLst>
+        </p:cTn>
+      </p:par>
+    </p:tnLst>
+    <p:bldLst>
+      <p:bldP spid="4" grpId="0"/>
+    </p:bldLst>
+  </p:timing>
+</p:sld>
+</file>
+
+<file path=ppt/slides/slide21.xml><?xml version="1.0" encoding="utf-8"?>
+<p:sld xmlns:a="http://schemas.openxmlformats.org/drawingml/2006/main" xmlns:r="http://schemas.openxmlformats.org/officeDocument/2006/relationships" xmlns:p="http://schemas.openxmlformats.org/presentationml/2006/main">
+  <p:cSld>
+    <p:spTree>
+      <p:nvGrpSpPr>
+        <p:cNvPr id="1" name=""/>
+        <p:cNvGrpSpPr/>
+        <p:nvPr/>
+      </p:nvGrpSpPr>
+      <p:grpSpPr>
+        <a:xfrm>
+          <a:off x="0" y="0"/>
+          <a:ext cx="0" cy="0"/>
+          <a:chOff x="0" y="0"/>
+          <a:chExt cx="0" cy="0"/>
+        </a:xfrm>
+      </p:grpSpPr>
+      <p:pic>
+        <p:nvPicPr>
+          <p:cNvPr id="3" name="Picture 2">
+            <a:extLst>
+              <a:ext uri="{FF2B5EF4-FFF2-40B4-BE49-F238E27FC236}">
+                <a16:creationId xmlns:a16="http://schemas.microsoft.com/office/drawing/2014/main" id="{764C5F03-5284-1199-21E6-73F2DB8D3930}"/>
+              </a:ext>
+            </a:extLst>
+          </p:cNvPr>
+          <p:cNvPicPr>
+            <a:picLocks noChangeAspect="1"/>
+          </p:cNvPicPr>
+          <p:nvPr/>
+        </p:nvPicPr>
+        <p:blipFill>
+          <a:blip r:embed="rId2">
+            <a:extLst>
+              <a:ext uri="{28A0092B-C50C-407E-A947-70E740481C1C}">
+                <a14:useLocalDpi xmlns:a14="http://schemas.microsoft.com/office/drawing/2010/main" val="0"/>
+              </a:ext>
+            </a:extLst>
+          </a:blip>
+          <a:srcRect/>
+          <a:stretch/>
+        </p:blipFill>
+        <p:spPr>
+          <a:xfrm>
+            <a:off x="3695700" y="1638300"/>
+            <a:ext cx="9829800" cy="7010400"/>
+          </a:xfrm>
+          <a:prstGeom prst="rect">
+            <a:avLst/>
+          </a:prstGeom>
+          <a:ln>
+            <a:noFill/>
+          </a:ln>
+          <a:effectLst>
+            <a:outerShdw blurRad="149987" dist="250190" dir="8460000" algn="ctr">
+              <a:srgbClr val="000000">
+                <a:alpha val="28000"/>
+              </a:srgbClr>
+            </a:outerShdw>
+          </a:effectLst>
+          <a:scene3d>
+            <a:camera prst="orthographicFront">
+              <a:rot lat="0" lon="0" rev="0"/>
+            </a:camera>
+            <a:lightRig rig="contrasting" dir="t">
+              <a:rot lat="0" lon="0" rev="1500000"/>
+            </a:lightRig>
+          </a:scene3d>
+          <a:sp3d prstMaterial="metal">
+            <a:bevelT w="88900" h="88900"/>
+          </a:sp3d>
+        </p:spPr>
+      </p:pic>
+      <p:sp>
+        <p:nvSpPr>
+          <p:cNvPr id="4" name="Google Shape;39;p2">
+            <a:extLst>
+              <a:ext uri="{FF2B5EF4-FFF2-40B4-BE49-F238E27FC236}">
+                <a16:creationId xmlns:a16="http://schemas.microsoft.com/office/drawing/2014/main" id="{07D06A95-A758-DB7C-0369-E46BC4571108}"/>
+              </a:ext>
+            </a:extLst>
+          </p:cNvPr>
+          <p:cNvSpPr/>
+          <p:nvPr/>
+        </p:nvSpPr>
+        <p:spPr>
+          <a:xfrm>
+            <a:off x="3695700" y="266700"/>
+            <a:ext cx="6667500" cy="1015663"/>
+          </a:xfrm>
+          <a:prstGeom prst="rect">
+            <a:avLst/>
+          </a:prstGeom>
+          <a:noFill/>
+          <a:ln>
+            <a:noFill/>
+          </a:ln>
+        </p:spPr>
+        <p:txBody>
+          <a:bodyPr spcFirstLastPara="1" wrap="square" lIns="0" tIns="0" rIns="0" bIns="0" anchor="t" anchorCtr="0">
+            <a:spAutoFit/>
+          </a:bodyPr>
+          <a:lstStyle/>
+          <a:p>
+            <a:r>
+              <a:rPr lang="en-US" sz="6600" dirty="0">
+                <a:solidFill>
+                  <a:schemeClr val="lt1"/>
+                </a:solidFill>
+                <a:ea typeface="Calibri"/>
+                <a:cs typeface="Calibri"/>
+              </a:rPr>
+              <a:t>Calculate Final Plan</a:t>
+            </a:r>
+          </a:p>
+        </p:txBody>
+      </p:sp>
+    </p:spTree>
+    <p:extLst>
+      <p:ext uri="{BB962C8B-B14F-4D97-AF65-F5344CB8AC3E}">
+        <p14:creationId xmlns:p14="http://schemas.microsoft.com/office/powerpoint/2010/main" val="438526759"/>
+      </p:ext>
+    </p:extLst>
+  </p:cSld>
+  <p:clrMapOvr>
+    <a:masterClrMapping/>
+  </p:clrMapOvr>
+  <mc:AlternateContent xmlns:mc="http://schemas.openxmlformats.org/markup-compatibility/2006">
+    <mc:Choice xmlns:p14="http://schemas.microsoft.com/office/powerpoint/2010/main" Requires="p14">
+      <p:transition spd="med" p14:dur="700">
+        <p:fade/>
+      </p:transition>
+    </mc:Choice>
+    <mc:Fallback>
+      <p:transition spd="med">
+        <p:fade/>
+      </p:transition>
+    </mc:Fallback>
+  </mc:AlternateContent>
+  <p:timing>
+    <p:tnLst>
+      <p:par>
+        <p:cTn id="1" dur="indefinite" restart="never" nodeType="tmRoot">
+          <p:childTnLst>
+            <p:seq concurrent="1" nextAc="seek">
+              <p:cTn id="2" dur="indefinite" nodeType="mainSeq">
+                <p:childTnLst>
+                  <p:par>
+                    <p:cTn id="3" fill="hold">
+                      <p:stCondLst>
+                        <p:cond delay="indefinite"/>
+                        <p:cond evt="onBegin" delay="0">
+                          <p:tn val="2"/>
+                        </p:cond>
+                      </p:stCondLst>
+                      <p:childTnLst>
+                        <p:par>
+                          <p:cTn id="4" fill="hold">
+                            <p:stCondLst>
+                              <p:cond delay="0"/>
+                            </p:stCondLst>
+                            <p:childTnLst>
+                              <p:par>
+                                <p:cTn id="5" presetID="22" presetClass="entr" presetSubtype="8" fill="hold" grpId="0" nodeType="withEffect">
+                                  <p:stCondLst>
+                                    <p:cond delay="0"/>
+                                  </p:stCondLst>
+                                  <p:childTnLst>
+                                    <p:set>
+                                      <p:cBhvr>
+                                        <p:cTn id="6" dur="1" fill="hold">
+                                          <p:stCondLst>
+                                            <p:cond delay="0"/>
+                                          </p:stCondLst>
+                                        </p:cTn>
+                                        <p:tgtEl>
+                                          <p:spTgt spid="4"/>
+                                        </p:tgtEl>
+                                        <p:attrNameLst>
+                                          <p:attrName>style.visibility</p:attrName>
+                                        </p:attrNameLst>
+                                      </p:cBhvr>
+                                      <p:to>
+                                        <p:strVal val="visible"/>
+                                      </p:to>
+                                    </p:set>
+                                    <p:animEffect transition="in" filter="wipe(left)">
+                                      <p:cBhvr>
+                                        <p:cTn id="7" dur="950"/>
+                                        <p:tgtEl>
+                                          <p:spTgt spid="4"/>
+                                        </p:tgtEl>
+                                      </p:cBhvr>
+                                    </p:animEffect>
+                                  </p:childTnLst>
+                                </p:cTn>
+                              </p:par>
+                              <p:par>
+                                <p:cTn id="8" presetID="22" presetClass="entr" presetSubtype="8" fill="hold" nodeType="withEffect">
+                                  <p:stCondLst>
+                                    <p:cond delay="0"/>
+                                  </p:stCondLst>
+                                  <p:childTnLst>
+                                    <p:set>
+                                      <p:cBhvr>
+                                        <p:cTn id="9" dur="1" fill="hold">
+                                          <p:stCondLst>
+                                            <p:cond delay="0"/>
+                                          </p:stCondLst>
+                                        </p:cTn>
+                                        <p:tgtEl>
+                                          <p:spTgt spid="3"/>
+                                        </p:tgtEl>
+                                        <p:attrNameLst>
+                                          <p:attrName>style.visibility</p:attrName>
+                                        </p:attrNameLst>
+                                      </p:cBhvr>
+                                      <p:to>
+                                        <p:strVal val="visible"/>
+                                      </p:to>
+                                    </p:set>
+                                    <p:animEffect transition="in" filter="wipe(left)">
+                                      <p:cBhvr>
+                                        <p:cTn id="10" dur="1000"/>
+                                        <p:tgtEl>
+                                          <p:spTgt spid="3"/>
+                                        </p:tgtEl>
+                                      </p:cBhvr>
+                                    </p:animEffect>
+                                  </p:childTnLst>
+                                </p:cTn>
+                              </p:par>
+                            </p:childTnLst>
+                          </p:cTn>
+                        </p:par>
+                      </p:childTnLst>
+                    </p:cTn>
+                  </p:par>
+                </p:childTnLst>
+              </p:cTn>
+              <p:prevCondLst>
+                <p:cond evt="onPrev" delay="0">
+                  <p:tgtEl>
+                    <p:sldTgt/>
+                  </p:tgtEl>
+                </p:cond>
+              </p:prevCondLst>
+              <p:nextCondLst>
+                <p:cond evt="onNext" delay="0">
+                  <p:tgtEl>
+                    <p:sldTgt/>
+                  </p:tgtEl>
+                </p:cond>
+              </p:nextCondLst>
+            </p:seq>
+          </p:childTnLst>
+        </p:cTn>
+      </p:par>
+    </p:tnLst>
+    <p:bldLst>
+      <p:bldP spid="4" grpId="0"/>
+    </p:bldLst>
+  </p:timing>
+</p:sld>
+</file>
+
+<file path=ppt/slides/slide22.xml><?xml version="1.0" encoding="utf-8"?>
+<p:sld xmlns:a="http://schemas.openxmlformats.org/drawingml/2006/main" xmlns:r="http://schemas.openxmlformats.org/officeDocument/2006/relationships" xmlns:p="http://schemas.openxmlformats.org/presentationml/2006/main">
+  <p:cSld>
+    <p:spTree>
+      <p:nvGrpSpPr>
+        <p:cNvPr id="1" name=""/>
+        <p:cNvGrpSpPr/>
+        <p:nvPr/>
+      </p:nvGrpSpPr>
+      <p:grpSpPr>
+        <a:xfrm>
+          <a:off x="0" y="0"/>
+          <a:ext cx="0" cy="0"/>
+          <a:chOff x="0" y="0"/>
+          <a:chExt cx="0" cy="0"/>
+        </a:xfrm>
+      </p:grpSpPr>
+      <p:pic>
+        <p:nvPicPr>
+          <p:cNvPr id="3" name="Picture 2">
+            <a:extLst>
+              <a:ext uri="{FF2B5EF4-FFF2-40B4-BE49-F238E27FC236}">
+                <a16:creationId xmlns:a16="http://schemas.microsoft.com/office/drawing/2014/main" id="{764C5F03-5284-1199-21E6-73F2DB8D3930}"/>
+              </a:ext>
+            </a:extLst>
+          </p:cNvPr>
+          <p:cNvPicPr>
+            <a:picLocks noChangeAspect="1"/>
+          </p:cNvPicPr>
+          <p:nvPr/>
+        </p:nvPicPr>
+        <p:blipFill>
+          <a:blip r:embed="rId2">
+            <a:extLst>
+              <a:ext uri="{28A0092B-C50C-407E-A947-70E740481C1C}">
+                <a14:useLocalDpi xmlns:a14="http://schemas.microsoft.com/office/drawing/2010/main" val="0"/>
+              </a:ext>
+            </a:extLst>
+          </a:blip>
+          <a:srcRect/>
+          <a:stretch/>
+        </p:blipFill>
+        <p:spPr>
+          <a:xfrm>
+            <a:off x="3043295" y="1638300"/>
+            <a:ext cx="11344782" cy="6723840"/>
+          </a:xfrm>
+          <a:prstGeom prst="rect">
+            <a:avLst/>
+          </a:prstGeom>
+          <a:ln>
+            <a:noFill/>
+          </a:ln>
+          <a:effectLst>
+            <a:outerShdw blurRad="149987" dist="250190" dir="8460000" algn="ctr">
+              <a:srgbClr val="000000">
+                <a:alpha val="28000"/>
+              </a:srgbClr>
+            </a:outerShdw>
+          </a:effectLst>
+          <a:scene3d>
+            <a:camera prst="orthographicFront">
+              <a:rot lat="0" lon="0" rev="0"/>
+            </a:camera>
+            <a:lightRig rig="contrasting" dir="t">
+              <a:rot lat="0" lon="0" rev="1500000"/>
+            </a:lightRig>
+          </a:scene3d>
+          <a:sp3d prstMaterial="metal">
+            <a:bevelT w="88900" h="88900"/>
+          </a:sp3d>
+        </p:spPr>
+      </p:pic>
+      <p:sp>
+        <p:nvSpPr>
+          <p:cNvPr id="4" name="Google Shape;39;p2">
+            <a:extLst>
+              <a:ext uri="{FF2B5EF4-FFF2-40B4-BE49-F238E27FC236}">
+                <a16:creationId xmlns:a16="http://schemas.microsoft.com/office/drawing/2014/main" id="{07D06A95-A758-DB7C-0369-E46BC4571108}"/>
+              </a:ext>
+            </a:extLst>
+          </p:cNvPr>
+          <p:cNvSpPr/>
+          <p:nvPr/>
+        </p:nvSpPr>
+        <p:spPr>
+          <a:xfrm>
+            <a:off x="3043295" y="495300"/>
+            <a:ext cx="5338160" cy="1015663"/>
+          </a:xfrm>
+          <a:prstGeom prst="rect">
+            <a:avLst/>
+          </a:prstGeom>
+          <a:noFill/>
+          <a:ln>
+            <a:noFill/>
+          </a:ln>
+        </p:spPr>
+        <p:txBody>
+          <a:bodyPr spcFirstLastPara="1" wrap="square" lIns="0" tIns="0" rIns="0" bIns="0" anchor="t" anchorCtr="0">
+            <a:spAutoFit/>
+          </a:bodyPr>
+          <a:lstStyle/>
+          <a:p>
+            <a:r>
+              <a:rPr lang="en-US" sz="6600" dirty="0">
+                <a:solidFill>
+                  <a:schemeClr val="lt1"/>
+                </a:solidFill>
+                <a:ea typeface="Calibri"/>
+                <a:cs typeface="Calibri"/>
+              </a:rPr>
+              <a:t>Admin Login</a:t>
+            </a:r>
+          </a:p>
+        </p:txBody>
+      </p:sp>
+    </p:spTree>
+    <p:extLst>
+      <p:ext uri="{BB962C8B-B14F-4D97-AF65-F5344CB8AC3E}">
+        <p14:creationId xmlns:p14="http://schemas.microsoft.com/office/powerpoint/2010/main" val="2444526906"/>
+      </p:ext>
+    </p:extLst>
+  </p:cSld>
+  <p:clrMapOvr>
+    <a:masterClrMapping/>
+  </p:clrMapOvr>
+  <mc:AlternateContent xmlns:mc="http://schemas.openxmlformats.org/markup-compatibility/2006">
+    <mc:Choice xmlns:p14="http://schemas.microsoft.com/office/powerpoint/2010/main" Requires="p14">
+      <p:transition spd="med" p14:dur="700">
+        <p:fade/>
+      </p:transition>
+    </mc:Choice>
+    <mc:Fallback>
+      <p:transition spd="med">
+        <p:fade/>
+      </p:transition>
+    </mc:Fallback>
+  </mc:AlternateContent>
+  <p:timing>
+    <p:tnLst>
+      <p:par>
+        <p:cTn id="1" dur="indefinite" restart="never" nodeType="tmRoot">
+          <p:childTnLst>
+            <p:seq concurrent="1" nextAc="seek">
+              <p:cTn id="2" dur="indefinite" nodeType="mainSeq">
+                <p:childTnLst>
+                  <p:par>
+                    <p:cTn id="3" fill="hold">
+                      <p:stCondLst>
+                        <p:cond delay="indefinite"/>
+                        <p:cond evt="onBegin" delay="0">
+                          <p:tn val="2"/>
+                        </p:cond>
+                      </p:stCondLst>
+                      <p:childTnLst>
+                        <p:par>
+                          <p:cTn id="4" fill="hold">
+                            <p:stCondLst>
+                              <p:cond delay="0"/>
+                            </p:stCondLst>
+                            <p:childTnLst>
+                              <p:par>
+                                <p:cTn id="5" presetID="22" presetClass="entr" presetSubtype="8" fill="hold" grpId="0" nodeType="withEffect">
+                                  <p:stCondLst>
+                                    <p:cond delay="0"/>
+                                  </p:stCondLst>
+                                  <p:childTnLst>
+                                    <p:set>
+                                      <p:cBhvr>
+                                        <p:cTn id="6" dur="1" fill="hold">
+                                          <p:stCondLst>
+                                            <p:cond delay="0"/>
+                                          </p:stCondLst>
+                                        </p:cTn>
+                                        <p:tgtEl>
+                                          <p:spTgt spid="4"/>
+                                        </p:tgtEl>
+                                        <p:attrNameLst>
+                                          <p:attrName>style.visibility</p:attrName>
+                                        </p:attrNameLst>
+                                      </p:cBhvr>
+                                      <p:to>
+                                        <p:strVal val="visible"/>
+                                      </p:to>
+                                    </p:set>
+                                    <p:animEffect transition="in" filter="wipe(left)">
+                                      <p:cBhvr>
+                                        <p:cTn id="7" dur="950"/>
+                                        <p:tgtEl>
+                                          <p:spTgt spid="4"/>
+                                        </p:tgtEl>
+                                      </p:cBhvr>
+                                    </p:animEffect>
+                                  </p:childTnLst>
+                                </p:cTn>
+                              </p:par>
+                              <p:par>
+                                <p:cTn id="8" presetID="22" presetClass="entr" presetSubtype="8" fill="hold" nodeType="withEffect">
+                                  <p:stCondLst>
+                                    <p:cond delay="0"/>
+                                  </p:stCondLst>
+                                  <p:childTnLst>
+                                    <p:set>
+                                      <p:cBhvr>
+                                        <p:cTn id="9" dur="1" fill="hold">
+                                          <p:stCondLst>
+                                            <p:cond delay="0"/>
+                                          </p:stCondLst>
+                                        </p:cTn>
+                                        <p:tgtEl>
+                                          <p:spTgt spid="3"/>
+                                        </p:tgtEl>
+                                        <p:attrNameLst>
+                                          <p:attrName>style.visibility</p:attrName>
+                                        </p:attrNameLst>
+                                      </p:cBhvr>
+                                      <p:to>
+                                        <p:strVal val="visible"/>
+                                      </p:to>
+                                    </p:set>
+                                    <p:animEffect transition="in" filter="wipe(left)">
+                                      <p:cBhvr>
+                                        <p:cTn id="10" dur="1000"/>
+                                        <p:tgtEl>
+                                          <p:spTgt spid="3"/>
+                                        </p:tgtEl>
+                                      </p:cBhvr>
+                                    </p:animEffect>
+                                  </p:childTnLst>
+                                </p:cTn>
+                              </p:par>
+                            </p:childTnLst>
+                          </p:cTn>
+                        </p:par>
+                      </p:childTnLst>
+                    </p:cTn>
+                  </p:par>
+                </p:childTnLst>
+              </p:cTn>
+              <p:prevCondLst>
+                <p:cond evt="onPrev" delay="0">
+                  <p:tgtEl>
+                    <p:sldTgt/>
+                  </p:tgtEl>
+                </p:cond>
+              </p:prevCondLst>
+              <p:nextCondLst>
+                <p:cond evt="onNext" delay="0">
+                  <p:tgtEl>
+                    <p:sldTgt/>
+                  </p:tgtEl>
+                </p:cond>
+              </p:nextCondLst>
+            </p:seq>
+          </p:childTnLst>
+        </p:cTn>
+      </p:par>
+    </p:tnLst>
+    <p:bldLst>
+      <p:bldP spid="4" grpId="0"/>
+    </p:bldLst>
+  </p:timing>
+</p:sld>
+</file>
+
+<file path=ppt/slides/slide23.xml><?xml version="1.0" encoding="utf-8"?>
+<p:sld xmlns:a="http://schemas.openxmlformats.org/drawingml/2006/main" xmlns:r="http://schemas.openxmlformats.org/officeDocument/2006/relationships" xmlns:p="http://schemas.openxmlformats.org/presentationml/2006/main">
+  <p:cSld>
+    <p:spTree>
+      <p:nvGrpSpPr>
+        <p:cNvPr id="1" name=""/>
+        <p:cNvGrpSpPr/>
+        <p:nvPr/>
+      </p:nvGrpSpPr>
+      <p:grpSpPr>
+        <a:xfrm>
+          <a:off x="0" y="0"/>
+          <a:ext cx="0" cy="0"/>
+          <a:chOff x="0" y="0"/>
+          <a:chExt cx="0" cy="0"/>
+        </a:xfrm>
+      </p:grpSpPr>
+      <p:pic>
+        <p:nvPicPr>
+          <p:cNvPr id="3" name="Picture 2">
+            <a:extLst>
+              <a:ext uri="{FF2B5EF4-FFF2-40B4-BE49-F238E27FC236}">
+                <a16:creationId xmlns:a16="http://schemas.microsoft.com/office/drawing/2014/main" id="{764C5F03-5284-1199-21E6-73F2DB8D3930}"/>
+              </a:ext>
+            </a:extLst>
+          </p:cNvPr>
+          <p:cNvPicPr>
+            <a:picLocks noChangeAspect="1"/>
+          </p:cNvPicPr>
+          <p:nvPr/>
+        </p:nvPicPr>
+        <p:blipFill>
+          <a:blip r:embed="rId2">
+            <a:extLst>
+              <a:ext uri="{28A0092B-C50C-407E-A947-70E740481C1C}">
+                <a14:useLocalDpi xmlns:a14="http://schemas.microsoft.com/office/drawing/2010/main" val="0"/>
+              </a:ext>
+            </a:extLst>
+          </a:blip>
+          <a:srcRect/>
+          <a:stretch/>
+        </p:blipFill>
+        <p:spPr>
+          <a:xfrm>
+            <a:off x="4152900" y="1524000"/>
+            <a:ext cx="9982200" cy="7239000"/>
+          </a:xfrm>
+          <a:prstGeom prst="rect">
+            <a:avLst/>
+          </a:prstGeom>
+          <a:ln>
+            <a:noFill/>
+          </a:ln>
+          <a:effectLst>
+            <a:outerShdw blurRad="149987" dist="250190" dir="8460000" algn="ctr">
+              <a:srgbClr val="000000">
+                <a:alpha val="28000"/>
+              </a:srgbClr>
+            </a:outerShdw>
+          </a:effectLst>
+          <a:scene3d>
+            <a:camera prst="orthographicFront">
+              <a:rot lat="0" lon="0" rev="0"/>
+            </a:camera>
+            <a:lightRig rig="contrasting" dir="t">
+              <a:rot lat="0" lon="0" rev="1500000"/>
+            </a:lightRig>
+          </a:scene3d>
+          <a:sp3d prstMaterial="metal">
+            <a:bevelT w="88900" h="88900"/>
+          </a:sp3d>
+        </p:spPr>
+      </p:pic>
+      <p:sp>
+        <p:nvSpPr>
+          <p:cNvPr id="4" name="Google Shape;39;p2">
+            <a:extLst>
+              <a:ext uri="{FF2B5EF4-FFF2-40B4-BE49-F238E27FC236}">
+                <a16:creationId xmlns:a16="http://schemas.microsoft.com/office/drawing/2014/main" id="{07D06A95-A758-DB7C-0369-E46BC4571108}"/>
+              </a:ext>
+            </a:extLst>
+          </p:cNvPr>
+          <p:cNvSpPr/>
+          <p:nvPr/>
+        </p:nvSpPr>
+        <p:spPr>
+          <a:xfrm>
+            <a:off x="4152900" y="342900"/>
+            <a:ext cx="5338160" cy="1015663"/>
+          </a:xfrm>
+          <a:prstGeom prst="rect">
+            <a:avLst/>
+          </a:prstGeom>
+          <a:noFill/>
+          <a:ln>
+            <a:noFill/>
+          </a:ln>
+        </p:spPr>
+        <p:txBody>
+          <a:bodyPr spcFirstLastPara="1" wrap="square" lIns="0" tIns="0" rIns="0" bIns="0" anchor="t" anchorCtr="0">
+            <a:spAutoFit/>
+          </a:bodyPr>
+          <a:lstStyle/>
+          <a:p>
+            <a:r>
+              <a:rPr lang="en-US" sz="6600" dirty="0">
+                <a:solidFill>
+                  <a:schemeClr val="lt1"/>
+                </a:solidFill>
+                <a:ea typeface="Calibri"/>
+                <a:cs typeface="Calibri"/>
+              </a:rPr>
+              <a:t>Add Event</a:t>
+            </a:r>
+          </a:p>
+        </p:txBody>
+      </p:sp>
+    </p:spTree>
+    <p:extLst>
+      <p:ext uri="{BB962C8B-B14F-4D97-AF65-F5344CB8AC3E}">
+        <p14:creationId xmlns:p14="http://schemas.microsoft.com/office/powerpoint/2010/main" val="4106795003"/>
+      </p:ext>
+    </p:extLst>
+  </p:cSld>
+  <p:clrMapOvr>
+    <a:masterClrMapping/>
+  </p:clrMapOvr>
+  <mc:AlternateContent xmlns:mc="http://schemas.openxmlformats.org/markup-compatibility/2006">
+    <mc:Choice xmlns:p14="http://schemas.microsoft.com/office/powerpoint/2010/main" Requires="p14">
+      <p:transition spd="med" p14:dur="700">
+        <p:fade/>
+      </p:transition>
+    </mc:Choice>
+    <mc:Fallback>
+      <p:transition spd="med">
+        <p:fade/>
+      </p:transition>
+    </mc:Fallback>
+  </mc:AlternateContent>
+  <p:timing>
+    <p:tnLst>
+      <p:par>
+        <p:cTn id="1" dur="indefinite" restart="never" nodeType="tmRoot">
+          <p:childTnLst>
+            <p:seq concurrent="1" nextAc="seek">
+              <p:cTn id="2" dur="indefinite" nodeType="mainSeq">
+                <p:childTnLst>
+                  <p:par>
+                    <p:cTn id="3" fill="hold">
+                      <p:stCondLst>
+                        <p:cond delay="indefinite"/>
+                        <p:cond evt="onBegin" delay="0">
+                          <p:tn val="2"/>
+                        </p:cond>
+                      </p:stCondLst>
+                      <p:childTnLst>
+                        <p:par>
+                          <p:cTn id="4" fill="hold">
+                            <p:stCondLst>
+                              <p:cond delay="0"/>
+                            </p:stCondLst>
+                            <p:childTnLst>
+                              <p:par>
+                                <p:cTn id="5" presetID="22" presetClass="entr" presetSubtype="8" fill="hold" grpId="0" nodeType="withEffect">
+                                  <p:stCondLst>
+                                    <p:cond delay="0"/>
+                                  </p:stCondLst>
+                                  <p:childTnLst>
+                                    <p:set>
+                                      <p:cBhvr>
+                                        <p:cTn id="6" dur="1" fill="hold">
+                                          <p:stCondLst>
+                                            <p:cond delay="0"/>
+                                          </p:stCondLst>
+                                        </p:cTn>
+                                        <p:tgtEl>
+                                          <p:spTgt spid="4"/>
+                                        </p:tgtEl>
+                                        <p:attrNameLst>
+                                          <p:attrName>style.visibility</p:attrName>
+                                        </p:attrNameLst>
+                                      </p:cBhvr>
+                                      <p:to>
+                                        <p:strVal val="visible"/>
+                                      </p:to>
+                                    </p:set>
+                                    <p:animEffect transition="in" filter="wipe(left)">
+                                      <p:cBhvr>
+                                        <p:cTn id="7" dur="950"/>
+                                        <p:tgtEl>
+                                          <p:spTgt spid="4"/>
+                                        </p:tgtEl>
+                                      </p:cBhvr>
+                                    </p:animEffect>
+                                  </p:childTnLst>
+                                </p:cTn>
+                              </p:par>
+                              <p:par>
+                                <p:cTn id="8" presetID="22" presetClass="entr" presetSubtype="8" fill="hold" nodeType="withEffect">
+                                  <p:stCondLst>
+                                    <p:cond delay="0"/>
+                                  </p:stCondLst>
+                                  <p:childTnLst>
+                                    <p:set>
+                                      <p:cBhvr>
+                                        <p:cTn id="9" dur="1" fill="hold">
+                                          <p:stCondLst>
+                                            <p:cond delay="0"/>
+                                          </p:stCondLst>
+                                        </p:cTn>
+                                        <p:tgtEl>
+                                          <p:spTgt spid="3"/>
+                                        </p:tgtEl>
+                                        <p:attrNameLst>
+                                          <p:attrName>style.visibility</p:attrName>
+                                        </p:attrNameLst>
+                                      </p:cBhvr>
+                                      <p:to>
+                                        <p:strVal val="visible"/>
+                                      </p:to>
+                                    </p:set>
+                                    <p:animEffect transition="in" filter="wipe(left)">
+                                      <p:cBhvr>
+                                        <p:cTn id="10" dur="1000"/>
+                                        <p:tgtEl>
+                                          <p:spTgt spid="3"/>
+                                        </p:tgtEl>
+                                      </p:cBhvr>
+                                    </p:animEffect>
+                                  </p:childTnLst>
+                                </p:cTn>
+                              </p:par>
+                            </p:childTnLst>
+                          </p:cTn>
+                        </p:par>
+                      </p:childTnLst>
+                    </p:cTn>
+                  </p:par>
+                </p:childTnLst>
+              </p:cTn>
+              <p:prevCondLst>
+                <p:cond evt="onPrev" delay="0">
+                  <p:tgtEl>
+                    <p:sldTgt/>
+                  </p:tgtEl>
+                </p:cond>
+              </p:prevCondLst>
+              <p:nextCondLst>
+                <p:cond evt="onNext" delay="0">
+                  <p:tgtEl>
+                    <p:sldTgt/>
+                  </p:tgtEl>
+                </p:cond>
+              </p:nextCondLst>
+            </p:seq>
+          </p:childTnLst>
+        </p:cTn>
+      </p:par>
+    </p:tnLst>
+    <p:bldLst>
+      <p:bldP spid="4" grpId="0"/>
+    </p:bldLst>
+  </p:timing>
+</p:sld>
+</file>
+
+<file path=ppt/slides/slide24.xml><?xml version="1.0" encoding="utf-8"?>
+<p:sld xmlns:a="http://schemas.openxmlformats.org/drawingml/2006/main" xmlns:r="http://schemas.openxmlformats.org/officeDocument/2006/relationships" xmlns:p="http://schemas.openxmlformats.org/presentationml/2006/main">
+  <p:cSld>
+    <p:spTree>
+      <p:nvGrpSpPr>
+        <p:cNvPr id="1" name=""/>
+        <p:cNvGrpSpPr/>
+        <p:nvPr/>
+      </p:nvGrpSpPr>
+      <p:grpSpPr>
+        <a:xfrm>
+          <a:off x="0" y="0"/>
+          <a:ext cx="0" cy="0"/>
+          <a:chOff x="0" y="0"/>
+          <a:chExt cx="0" cy="0"/>
+        </a:xfrm>
+      </p:grpSpPr>
+      <p:pic>
+        <p:nvPicPr>
+          <p:cNvPr id="3" name="Picture 2">
+            <a:extLst>
+              <a:ext uri="{FF2B5EF4-FFF2-40B4-BE49-F238E27FC236}">
+                <a16:creationId xmlns:a16="http://schemas.microsoft.com/office/drawing/2014/main" id="{764C5F03-5284-1199-21E6-73F2DB8D3930}"/>
+              </a:ext>
+            </a:extLst>
+          </p:cNvPr>
+          <p:cNvPicPr>
+            <a:picLocks noChangeAspect="1"/>
+          </p:cNvPicPr>
+          <p:nvPr/>
+        </p:nvPicPr>
+        <p:blipFill>
+          <a:blip r:embed="rId2">
+            <a:extLst>
+              <a:ext uri="{28A0092B-C50C-407E-A947-70E740481C1C}">
+                <a14:useLocalDpi xmlns:a14="http://schemas.microsoft.com/office/drawing/2010/main" val="0"/>
+              </a:ext>
+            </a:extLst>
+          </a:blip>
+          <a:srcRect/>
+          <a:stretch/>
+        </p:blipFill>
+        <p:spPr>
+          <a:xfrm>
+            <a:off x="3695700" y="1532053"/>
+            <a:ext cx="10896599" cy="7222894"/>
+          </a:xfrm>
+          <a:prstGeom prst="rect">
+            <a:avLst/>
+          </a:prstGeom>
+          <a:ln>
+            <a:noFill/>
+          </a:ln>
+          <a:effectLst>
+            <a:outerShdw blurRad="149987" dist="250190" dir="8460000" algn="ctr">
+              <a:srgbClr val="000000">
+                <a:alpha val="28000"/>
+              </a:srgbClr>
+            </a:outerShdw>
+          </a:effectLst>
+          <a:scene3d>
+            <a:camera prst="orthographicFront">
+              <a:rot lat="0" lon="0" rev="0"/>
+            </a:camera>
+            <a:lightRig rig="contrasting" dir="t">
+              <a:rot lat="0" lon="0" rev="1500000"/>
+            </a:lightRig>
+          </a:scene3d>
+          <a:sp3d prstMaterial="metal">
+            <a:bevelT w="88900" h="88900"/>
+          </a:sp3d>
+        </p:spPr>
+      </p:pic>
+      <p:sp>
+        <p:nvSpPr>
+          <p:cNvPr id="4" name="Google Shape;39;p2">
+            <a:extLst>
+              <a:ext uri="{FF2B5EF4-FFF2-40B4-BE49-F238E27FC236}">
+                <a16:creationId xmlns:a16="http://schemas.microsoft.com/office/drawing/2014/main" id="{07D06A95-A758-DB7C-0369-E46BC4571108}"/>
+              </a:ext>
+            </a:extLst>
+          </p:cNvPr>
+          <p:cNvSpPr/>
+          <p:nvPr/>
+        </p:nvSpPr>
+        <p:spPr>
+          <a:xfrm>
+            <a:off x="3695700" y="342900"/>
+            <a:ext cx="7124700" cy="1015663"/>
+          </a:xfrm>
+          <a:prstGeom prst="rect">
+            <a:avLst/>
+          </a:prstGeom>
+          <a:noFill/>
+          <a:ln>
+            <a:noFill/>
+          </a:ln>
+        </p:spPr>
+        <p:txBody>
+          <a:bodyPr spcFirstLastPara="1" wrap="square" lIns="0" tIns="0" rIns="0" bIns="0" anchor="t" anchorCtr="0">
+            <a:spAutoFit/>
+          </a:bodyPr>
+          <a:lstStyle/>
+          <a:p>
+            <a:r>
+              <a:rPr lang="en-US" sz="6600" dirty="0">
+                <a:solidFill>
+                  <a:schemeClr val="lt1"/>
+                </a:solidFill>
+                <a:ea typeface="Calibri"/>
+                <a:cs typeface="Calibri"/>
+              </a:rPr>
+              <a:t>Update Event Seats</a:t>
+            </a:r>
+          </a:p>
+        </p:txBody>
+      </p:sp>
+    </p:spTree>
+    <p:extLst>
+      <p:ext uri="{BB962C8B-B14F-4D97-AF65-F5344CB8AC3E}">
+        <p14:creationId xmlns:p14="http://schemas.microsoft.com/office/powerpoint/2010/main" val="870294678"/>
+      </p:ext>
+    </p:extLst>
+  </p:cSld>
+  <p:clrMapOvr>
+    <a:masterClrMapping/>
+  </p:clrMapOvr>
+  <mc:AlternateContent xmlns:mc="http://schemas.openxmlformats.org/markup-compatibility/2006">
+    <mc:Choice xmlns:p14="http://schemas.microsoft.com/office/powerpoint/2010/main" Requires="p14">
+      <p:transition spd="med" p14:dur="700">
+        <p:fade/>
+      </p:transition>
+    </mc:Choice>
+    <mc:Fallback>
+      <p:transition spd="med">
+        <p:fade/>
+      </p:transition>
+    </mc:Fallback>
+  </mc:AlternateContent>
+  <p:timing>
+    <p:tnLst>
+      <p:par>
+        <p:cTn id="1" dur="indefinite" restart="never" nodeType="tmRoot">
+          <p:childTnLst>
+            <p:seq concurrent="1" nextAc="seek">
+              <p:cTn id="2" dur="indefinite" nodeType="mainSeq">
+                <p:childTnLst>
+                  <p:par>
+                    <p:cTn id="3" fill="hold">
+                      <p:stCondLst>
+                        <p:cond delay="indefinite"/>
+                        <p:cond evt="onBegin" delay="0">
+                          <p:tn val="2"/>
+                        </p:cond>
+                      </p:stCondLst>
+                      <p:childTnLst>
+                        <p:par>
+                          <p:cTn id="4" fill="hold">
+                            <p:stCondLst>
+                              <p:cond delay="0"/>
+                            </p:stCondLst>
+                            <p:childTnLst>
+                              <p:par>
+                                <p:cTn id="5" presetID="22" presetClass="entr" presetSubtype="8" fill="hold" grpId="0" nodeType="withEffect">
+                                  <p:stCondLst>
+                                    <p:cond delay="0"/>
+                                  </p:stCondLst>
+                                  <p:childTnLst>
+                                    <p:set>
+                                      <p:cBhvr>
+                                        <p:cTn id="6" dur="1" fill="hold">
+                                          <p:stCondLst>
+                                            <p:cond delay="0"/>
+                                          </p:stCondLst>
+                                        </p:cTn>
+                                        <p:tgtEl>
+                                          <p:spTgt spid="4"/>
+                                        </p:tgtEl>
+                                        <p:attrNameLst>
+                                          <p:attrName>style.visibility</p:attrName>
+                                        </p:attrNameLst>
+                                      </p:cBhvr>
+                                      <p:to>
+                                        <p:strVal val="visible"/>
+                                      </p:to>
+                                    </p:set>
+                                    <p:animEffect transition="in" filter="wipe(left)">
+                                      <p:cBhvr>
+                                        <p:cTn id="7" dur="950"/>
+                                        <p:tgtEl>
+                                          <p:spTgt spid="4"/>
+                                        </p:tgtEl>
+                                      </p:cBhvr>
+                                    </p:animEffect>
+                                  </p:childTnLst>
+                                </p:cTn>
+                              </p:par>
+                              <p:par>
+                                <p:cTn id="8" presetID="22" presetClass="entr" presetSubtype="8" fill="hold" nodeType="withEffect">
+                                  <p:stCondLst>
+                                    <p:cond delay="0"/>
+                                  </p:stCondLst>
+                                  <p:childTnLst>
+                                    <p:set>
+                                      <p:cBhvr>
+                                        <p:cTn id="9" dur="1" fill="hold">
+                                          <p:stCondLst>
+                                            <p:cond delay="0"/>
+                                          </p:stCondLst>
+                                        </p:cTn>
+                                        <p:tgtEl>
+                                          <p:spTgt spid="3"/>
+                                        </p:tgtEl>
+                                        <p:attrNameLst>
+                                          <p:attrName>style.visibility</p:attrName>
+                                        </p:attrNameLst>
+                                      </p:cBhvr>
+                                      <p:to>
+                                        <p:strVal val="visible"/>
+                                      </p:to>
+                                    </p:set>
+                                    <p:animEffect transition="in" filter="wipe(left)">
+                                      <p:cBhvr>
+                                        <p:cTn id="10" dur="1000"/>
+                                        <p:tgtEl>
+                                          <p:spTgt spid="3"/>
+                                        </p:tgtEl>
+                                      </p:cBhvr>
+                                    </p:animEffect>
+                                  </p:childTnLst>
+                                </p:cTn>
+                              </p:par>
+                            </p:childTnLst>
+                          </p:cTn>
+                        </p:par>
+                      </p:childTnLst>
+                    </p:cTn>
+                  </p:par>
+                </p:childTnLst>
+              </p:cTn>
+              <p:prevCondLst>
+                <p:cond evt="onPrev" delay="0">
+                  <p:tgtEl>
+                    <p:sldTgt/>
+                  </p:tgtEl>
+                </p:cond>
+              </p:prevCondLst>
+              <p:nextCondLst>
+                <p:cond evt="onNext" delay="0">
+                  <p:tgtEl>
+                    <p:sldTgt/>
+                  </p:tgtEl>
+                </p:cond>
+              </p:nextCondLst>
+            </p:seq>
+          </p:childTnLst>
+        </p:cTn>
+      </p:par>
+    </p:tnLst>
+    <p:bldLst>
+      <p:bldP spid="4" grpId="0"/>
+    </p:bldLst>
+  </p:timing>
+</p:sld>
+</file>
+
+<file path=ppt/slides/slide25.xml><?xml version="1.0" encoding="utf-8"?>
+<p:sld xmlns:a="http://schemas.openxmlformats.org/drawingml/2006/main" xmlns:r="http://schemas.openxmlformats.org/officeDocument/2006/relationships" xmlns:p="http://schemas.openxmlformats.org/presentationml/2006/main">
+  <p:cSld>
+    <p:spTree>
+      <p:nvGrpSpPr>
+        <p:cNvPr id="1" name=""/>
+        <p:cNvGrpSpPr/>
+        <p:nvPr/>
+      </p:nvGrpSpPr>
+      <p:grpSpPr>
+        <a:xfrm>
+          <a:off x="0" y="0"/>
+          <a:ext cx="0" cy="0"/>
+          <a:chOff x="0" y="0"/>
+          <a:chExt cx="0" cy="0"/>
+        </a:xfrm>
+      </p:grpSpPr>
+      <p:pic>
+        <p:nvPicPr>
+          <p:cNvPr id="3" name="Picture 2">
+            <a:extLst>
+              <a:ext uri="{FF2B5EF4-FFF2-40B4-BE49-F238E27FC236}">
+                <a16:creationId xmlns:a16="http://schemas.microsoft.com/office/drawing/2014/main" id="{764C5F03-5284-1199-21E6-73F2DB8D3930}"/>
+              </a:ext>
+            </a:extLst>
+          </p:cNvPr>
+          <p:cNvPicPr>
+            <a:picLocks noChangeAspect="1"/>
+          </p:cNvPicPr>
+          <p:nvPr/>
+        </p:nvPicPr>
+        <p:blipFill>
+          <a:blip r:embed="rId2">
+            <a:extLst>
+              <a:ext uri="{28A0092B-C50C-407E-A947-70E740481C1C}">
+                <a14:useLocalDpi xmlns:a14="http://schemas.microsoft.com/office/drawing/2010/main" val="0"/>
+              </a:ext>
+            </a:extLst>
+          </a:blip>
+          <a:srcRect/>
+          <a:stretch/>
+        </p:blipFill>
+        <p:spPr>
+          <a:xfrm>
+            <a:off x="3880074" y="1562100"/>
+            <a:ext cx="10527851" cy="7162800"/>
+          </a:xfrm>
+          <a:prstGeom prst="rect">
+            <a:avLst/>
+          </a:prstGeom>
+          <a:ln>
+            <a:noFill/>
+          </a:ln>
+          <a:effectLst>
+            <a:outerShdw blurRad="149987" dist="250190" dir="8460000" algn="ctr">
+              <a:srgbClr val="000000">
+                <a:alpha val="28000"/>
+              </a:srgbClr>
+            </a:outerShdw>
+          </a:effectLst>
+          <a:scene3d>
+            <a:camera prst="orthographicFront">
+              <a:rot lat="0" lon="0" rev="0"/>
+            </a:camera>
+            <a:lightRig rig="contrasting" dir="t">
+              <a:rot lat="0" lon="0" rev="1500000"/>
+            </a:lightRig>
+          </a:scene3d>
+          <a:sp3d prstMaterial="metal">
+            <a:bevelT w="88900" h="88900"/>
+          </a:sp3d>
+        </p:spPr>
+      </p:pic>
+      <p:sp>
+        <p:nvSpPr>
+          <p:cNvPr id="4" name="Google Shape;39;p2">
+            <a:extLst>
+              <a:ext uri="{FF2B5EF4-FFF2-40B4-BE49-F238E27FC236}">
+                <a16:creationId xmlns:a16="http://schemas.microsoft.com/office/drawing/2014/main" id="{07D06A95-A758-DB7C-0369-E46BC4571108}"/>
+              </a:ext>
+            </a:extLst>
+          </p:cNvPr>
+          <p:cNvSpPr/>
+          <p:nvPr/>
+        </p:nvSpPr>
+        <p:spPr>
+          <a:xfrm>
+            <a:off x="3880074" y="190500"/>
+            <a:ext cx="6635526" cy="1015663"/>
+          </a:xfrm>
+          <a:prstGeom prst="rect">
+            <a:avLst/>
+          </a:prstGeom>
+          <a:noFill/>
+          <a:ln>
+            <a:noFill/>
+          </a:ln>
+        </p:spPr>
+        <p:txBody>
+          <a:bodyPr spcFirstLastPara="1" wrap="square" lIns="0" tIns="0" rIns="0" bIns="0" anchor="t" anchorCtr="0">
+            <a:spAutoFit/>
+          </a:bodyPr>
+          <a:lstStyle/>
+          <a:p>
+            <a:r>
+              <a:rPr lang="en-US" sz="6600" dirty="0">
+                <a:solidFill>
+                  <a:schemeClr val="lt1"/>
+                </a:solidFill>
+                <a:ea typeface="Calibri"/>
+                <a:cs typeface="Calibri"/>
+              </a:rPr>
+              <a:t>Update Event Price</a:t>
+            </a:r>
+          </a:p>
+        </p:txBody>
+      </p:sp>
+    </p:spTree>
+    <p:extLst>
+      <p:ext uri="{BB962C8B-B14F-4D97-AF65-F5344CB8AC3E}">
+        <p14:creationId xmlns:p14="http://schemas.microsoft.com/office/powerpoint/2010/main" val="388191832"/>
+      </p:ext>
+    </p:extLst>
+  </p:cSld>
+  <p:clrMapOvr>
+    <a:masterClrMapping/>
+  </p:clrMapOvr>
+  <mc:AlternateContent xmlns:mc="http://schemas.openxmlformats.org/markup-compatibility/2006">
+    <mc:Choice xmlns:p14="http://schemas.microsoft.com/office/powerpoint/2010/main" Requires="p14">
+      <p:transition spd="med" p14:dur="700">
+        <p:fade/>
+      </p:transition>
+    </mc:Choice>
+    <mc:Fallback>
+      <p:transition spd="med">
+        <p:fade/>
+      </p:transition>
+    </mc:Fallback>
+  </mc:AlternateContent>
+  <p:timing>
+    <p:tnLst>
+      <p:par>
+        <p:cTn id="1" dur="indefinite" restart="never" nodeType="tmRoot">
+          <p:childTnLst>
+            <p:seq concurrent="1" nextAc="seek">
+              <p:cTn id="2" dur="indefinite" nodeType="mainSeq">
+                <p:childTnLst>
+                  <p:par>
+                    <p:cTn id="3" fill="hold">
+                      <p:stCondLst>
+                        <p:cond delay="indefinite"/>
+                        <p:cond evt="onBegin" delay="0">
+                          <p:tn val="2"/>
+                        </p:cond>
+                      </p:stCondLst>
+                      <p:childTnLst>
+                        <p:par>
+                          <p:cTn id="4" fill="hold">
+                            <p:stCondLst>
+                              <p:cond delay="0"/>
+                            </p:stCondLst>
+                            <p:childTnLst>
+                              <p:par>
+                                <p:cTn id="5" presetID="22" presetClass="entr" presetSubtype="8" fill="hold" grpId="0" nodeType="withEffect">
+                                  <p:stCondLst>
+                                    <p:cond delay="0"/>
+                                  </p:stCondLst>
+                                  <p:childTnLst>
+                                    <p:set>
+                                      <p:cBhvr>
+                                        <p:cTn id="6" dur="1" fill="hold">
+                                          <p:stCondLst>
+                                            <p:cond delay="0"/>
+                                          </p:stCondLst>
+                                        </p:cTn>
+                                        <p:tgtEl>
+                                          <p:spTgt spid="4"/>
+                                        </p:tgtEl>
+                                        <p:attrNameLst>
+                                          <p:attrName>style.visibility</p:attrName>
+                                        </p:attrNameLst>
+                                      </p:cBhvr>
+                                      <p:to>
+                                        <p:strVal val="visible"/>
+                                      </p:to>
+                                    </p:set>
+                                    <p:animEffect transition="in" filter="wipe(left)">
+                                      <p:cBhvr>
+                                        <p:cTn id="7" dur="950"/>
+                                        <p:tgtEl>
+                                          <p:spTgt spid="4"/>
+                                        </p:tgtEl>
+                                      </p:cBhvr>
+                                    </p:animEffect>
+                                  </p:childTnLst>
+                                </p:cTn>
+                              </p:par>
+                              <p:par>
+                                <p:cTn id="8" presetID="22" presetClass="entr" presetSubtype="8" fill="hold" nodeType="withEffect">
+                                  <p:stCondLst>
+                                    <p:cond delay="0"/>
+                                  </p:stCondLst>
+                                  <p:childTnLst>
+                                    <p:set>
+                                      <p:cBhvr>
+                                        <p:cTn id="9" dur="1" fill="hold">
+                                          <p:stCondLst>
+                                            <p:cond delay="0"/>
+                                          </p:stCondLst>
+                                        </p:cTn>
+                                        <p:tgtEl>
+                                          <p:spTgt spid="3"/>
+                                        </p:tgtEl>
+                                        <p:attrNameLst>
+                                          <p:attrName>style.visibility</p:attrName>
+                                        </p:attrNameLst>
+                                      </p:cBhvr>
+                                      <p:to>
+                                        <p:strVal val="visible"/>
+                                      </p:to>
+                                    </p:set>
+                                    <p:animEffect transition="in" filter="wipe(left)">
+                                      <p:cBhvr>
+                                        <p:cTn id="10" dur="1000"/>
+                                        <p:tgtEl>
+                                          <p:spTgt spid="3"/>
+                                        </p:tgtEl>
+                                      </p:cBhvr>
+                                    </p:animEffect>
+                                  </p:childTnLst>
+                                </p:cTn>
+                              </p:par>
+                            </p:childTnLst>
+                          </p:cTn>
+                        </p:par>
+                      </p:childTnLst>
+                    </p:cTn>
+                  </p:par>
+                </p:childTnLst>
+              </p:cTn>
+              <p:prevCondLst>
+                <p:cond evt="onPrev" delay="0">
+                  <p:tgtEl>
+                    <p:sldTgt/>
+                  </p:tgtEl>
+                </p:cond>
+              </p:prevCondLst>
+              <p:nextCondLst>
+                <p:cond evt="onNext" delay="0">
+                  <p:tgtEl>
+                    <p:sldTgt/>
+                  </p:tgtEl>
+                </p:cond>
+              </p:nextCondLst>
+            </p:seq>
+          </p:childTnLst>
+        </p:cTn>
+      </p:par>
+    </p:tnLst>
+    <p:bldLst>
+      <p:bldP spid="4" grpId="0"/>
+    </p:bldLst>
+  </p:timing>
+</p:sld>
+</file>
+
+<file path=ppt/slides/slide26.xml><?xml version="1.0" encoding="utf-8"?>
+<p:sld xmlns:a="http://schemas.openxmlformats.org/drawingml/2006/main" xmlns:r="http://schemas.openxmlformats.org/officeDocument/2006/relationships" xmlns:p="http://schemas.openxmlformats.org/presentationml/2006/main">
+  <p:cSld>
+    <p:spTree>
+      <p:nvGrpSpPr>
+        <p:cNvPr id="1" name=""/>
+        <p:cNvGrpSpPr/>
+        <p:nvPr/>
+      </p:nvGrpSpPr>
+      <p:grpSpPr>
+        <a:xfrm>
+          <a:off x="0" y="0"/>
+          <a:ext cx="0" cy="0"/>
+          <a:chOff x="0" y="0"/>
+          <a:chExt cx="0" cy="0"/>
+        </a:xfrm>
+      </p:grpSpPr>
+      <p:pic>
+        <p:nvPicPr>
+          <p:cNvPr id="3" name="Picture 2">
+            <a:extLst>
+              <a:ext uri="{FF2B5EF4-FFF2-40B4-BE49-F238E27FC236}">
+                <a16:creationId xmlns:a16="http://schemas.microsoft.com/office/drawing/2014/main" id="{764C5F03-5284-1199-21E6-73F2DB8D3930}"/>
+              </a:ext>
+            </a:extLst>
+          </p:cNvPr>
+          <p:cNvPicPr>
+            <a:picLocks noChangeAspect="1"/>
+          </p:cNvPicPr>
+          <p:nvPr/>
+        </p:nvPicPr>
+        <p:blipFill>
+          <a:blip r:embed="rId2">
+            <a:extLst>
+              <a:ext uri="{28A0092B-C50C-407E-A947-70E740481C1C}">
+                <a14:useLocalDpi xmlns:a14="http://schemas.microsoft.com/office/drawing/2010/main" val="0"/>
+              </a:ext>
+            </a:extLst>
+          </a:blip>
+          <a:srcRect/>
+          <a:stretch/>
+        </p:blipFill>
+        <p:spPr>
+          <a:xfrm>
+            <a:off x="984439" y="1714500"/>
+            <a:ext cx="16319121" cy="6781799"/>
+          </a:xfrm>
+          <a:prstGeom prst="rect">
+            <a:avLst/>
+          </a:prstGeom>
+          <a:ln>
+            <a:noFill/>
+          </a:ln>
+          <a:effectLst>
+            <a:outerShdw blurRad="149987" dist="250190" dir="8460000" algn="ctr">
+              <a:srgbClr val="000000">
+                <a:alpha val="28000"/>
+              </a:srgbClr>
+            </a:outerShdw>
+          </a:effectLst>
+          <a:scene3d>
+            <a:camera prst="orthographicFront">
+              <a:rot lat="0" lon="0" rev="0"/>
+            </a:camera>
+            <a:lightRig rig="contrasting" dir="t">
+              <a:rot lat="0" lon="0" rev="1500000"/>
+            </a:lightRig>
+          </a:scene3d>
+          <a:sp3d prstMaterial="metal">
+            <a:bevelT w="88900" h="88900"/>
+          </a:sp3d>
+        </p:spPr>
+      </p:pic>
+      <p:sp>
+        <p:nvSpPr>
+          <p:cNvPr id="4" name="Google Shape;39;p2">
+            <a:extLst>
+              <a:ext uri="{FF2B5EF4-FFF2-40B4-BE49-F238E27FC236}">
+                <a16:creationId xmlns:a16="http://schemas.microsoft.com/office/drawing/2014/main" id="{07D06A95-A758-DB7C-0369-E46BC4571108}"/>
+              </a:ext>
+            </a:extLst>
+          </p:cNvPr>
+          <p:cNvSpPr/>
+          <p:nvPr/>
+        </p:nvSpPr>
+        <p:spPr>
+          <a:xfrm>
+            <a:off x="984438" y="495300"/>
+            <a:ext cx="8311961" cy="1015663"/>
+          </a:xfrm>
+          <a:prstGeom prst="rect">
+            <a:avLst/>
+          </a:prstGeom>
+          <a:noFill/>
+          <a:ln>
+            <a:noFill/>
+          </a:ln>
+        </p:spPr>
+        <p:txBody>
+          <a:bodyPr spcFirstLastPara="1" wrap="square" lIns="0" tIns="0" rIns="0" bIns="0" anchor="t" anchorCtr="0">
+            <a:spAutoFit/>
+          </a:bodyPr>
+          <a:lstStyle/>
+          <a:p>
+            <a:r>
+              <a:rPr lang="en-US" sz="6600" dirty="0">
+                <a:solidFill>
+                  <a:schemeClr val="lt1"/>
+                </a:solidFill>
+                <a:ea typeface="Calibri"/>
+                <a:cs typeface="Calibri"/>
+              </a:rPr>
+              <a:t>Admin Removes Event</a:t>
+            </a:r>
+          </a:p>
+        </p:txBody>
+      </p:sp>
+    </p:spTree>
+    <p:extLst>
+      <p:ext uri="{BB962C8B-B14F-4D97-AF65-F5344CB8AC3E}">
+        <p14:creationId xmlns:p14="http://schemas.microsoft.com/office/powerpoint/2010/main" val="4280440160"/>
+      </p:ext>
+    </p:extLst>
+  </p:cSld>
+  <p:clrMapOvr>
+    <a:masterClrMapping/>
+  </p:clrMapOvr>
+  <mc:AlternateContent xmlns:mc="http://schemas.openxmlformats.org/markup-compatibility/2006">
+    <mc:Choice xmlns:p14="http://schemas.microsoft.com/office/powerpoint/2010/main" Requires="p14">
+      <p:transition spd="med" p14:dur="700">
+        <p:fade/>
+      </p:transition>
+    </mc:Choice>
+    <mc:Fallback>
+      <p:transition spd="med">
+        <p:fade/>
+      </p:transition>
+    </mc:Fallback>
+  </mc:AlternateContent>
+  <p:timing>
+    <p:tnLst>
+      <p:par>
+        <p:cTn id="1" dur="indefinite" restart="never" nodeType="tmRoot">
+          <p:childTnLst>
+            <p:seq concurrent="1" nextAc="seek">
+              <p:cTn id="2" dur="indefinite" nodeType="mainSeq">
+                <p:childTnLst>
+                  <p:par>
+                    <p:cTn id="3" fill="hold">
+                      <p:stCondLst>
+                        <p:cond delay="indefinite"/>
+                        <p:cond evt="onBegin" delay="0">
+                          <p:tn val="2"/>
+                        </p:cond>
+                      </p:stCondLst>
+                      <p:childTnLst>
+                        <p:par>
+                          <p:cTn id="4" fill="hold">
+                            <p:stCondLst>
+                              <p:cond delay="0"/>
+                            </p:stCondLst>
+                            <p:childTnLst>
+                              <p:par>
+                                <p:cTn id="5" presetID="22" presetClass="entr" presetSubtype="8" fill="hold" grpId="0" nodeType="withEffect">
+                                  <p:stCondLst>
+                                    <p:cond delay="0"/>
+                                  </p:stCondLst>
+                                  <p:childTnLst>
+                                    <p:set>
+                                      <p:cBhvr>
+                                        <p:cTn id="6" dur="1" fill="hold">
+                                          <p:stCondLst>
+                                            <p:cond delay="0"/>
+                                          </p:stCondLst>
+                                        </p:cTn>
+                                        <p:tgtEl>
+                                          <p:spTgt spid="4"/>
+                                        </p:tgtEl>
+                                        <p:attrNameLst>
+                                          <p:attrName>style.visibility</p:attrName>
+                                        </p:attrNameLst>
+                                      </p:cBhvr>
+                                      <p:to>
+                                        <p:strVal val="visible"/>
+                                      </p:to>
+                                    </p:set>
+                                    <p:animEffect transition="in" filter="wipe(left)">
+                                      <p:cBhvr>
+                                        <p:cTn id="7" dur="950"/>
+                                        <p:tgtEl>
+                                          <p:spTgt spid="4"/>
+                                        </p:tgtEl>
+                                      </p:cBhvr>
+                                    </p:animEffect>
+                                  </p:childTnLst>
+                                </p:cTn>
+                              </p:par>
+                              <p:par>
+                                <p:cTn id="8" presetID="22" presetClass="entr" presetSubtype="8" fill="hold" nodeType="withEffect">
+                                  <p:stCondLst>
+                                    <p:cond delay="0"/>
+                                  </p:stCondLst>
+                                  <p:childTnLst>
+                                    <p:set>
+                                      <p:cBhvr>
+                                        <p:cTn id="9" dur="1" fill="hold">
+                                          <p:stCondLst>
+                                            <p:cond delay="0"/>
+                                          </p:stCondLst>
+                                        </p:cTn>
+                                        <p:tgtEl>
+                                          <p:spTgt spid="3"/>
+                                        </p:tgtEl>
+                                        <p:attrNameLst>
+                                          <p:attrName>style.visibility</p:attrName>
+                                        </p:attrNameLst>
+                                      </p:cBhvr>
+                                      <p:to>
+                                        <p:strVal val="visible"/>
+                                      </p:to>
+                                    </p:set>
+                                    <p:animEffect transition="in" filter="wipe(left)">
+                                      <p:cBhvr>
+                                        <p:cTn id="10" dur="1000"/>
+                                        <p:tgtEl>
+                                          <p:spTgt spid="3"/>
+                                        </p:tgtEl>
+                                      </p:cBhvr>
+                                    </p:animEffect>
+                                  </p:childTnLst>
+                                </p:cTn>
+                              </p:par>
+                            </p:childTnLst>
+                          </p:cTn>
+                        </p:par>
+                      </p:childTnLst>
+                    </p:cTn>
+                  </p:par>
+                </p:childTnLst>
+              </p:cTn>
+              <p:prevCondLst>
+                <p:cond evt="onPrev" delay="0">
+                  <p:tgtEl>
+                    <p:sldTgt/>
+                  </p:tgtEl>
+                </p:cond>
+              </p:prevCondLst>
+              <p:nextCondLst>
+                <p:cond evt="onNext" delay="0">
+                  <p:tgtEl>
+                    <p:sldTgt/>
+                  </p:tgtEl>
+                </p:cond>
+              </p:nextCondLst>
+            </p:seq>
+          </p:childTnLst>
+        </p:cTn>
+      </p:par>
+    </p:tnLst>
+    <p:bldLst>
+      <p:bldP spid="4" grpId="0"/>
+    </p:bldLst>
+  </p:timing>
+</p:sld>
+</file>
+
+<file path=ppt/slides/slide27.xml><?xml version="1.0" encoding="utf-8"?>
+<p:sld xmlns:a="http://schemas.openxmlformats.org/drawingml/2006/main" xmlns:r="http://schemas.openxmlformats.org/officeDocument/2006/relationships" xmlns:p="http://schemas.openxmlformats.org/presentationml/2006/main">
+  <p:cSld>
+    <p:spTree>
+      <p:nvGrpSpPr>
+        <p:cNvPr id="1" name=""/>
+        <p:cNvGrpSpPr/>
+        <p:nvPr/>
+      </p:nvGrpSpPr>
+      <p:grpSpPr>
+        <a:xfrm>
+          <a:off x="0" y="0"/>
+          <a:ext cx="0" cy="0"/>
+          <a:chOff x="0" y="0"/>
+          <a:chExt cx="0" cy="0"/>
+        </a:xfrm>
+      </p:grpSpPr>
+      <p:pic>
+        <p:nvPicPr>
+          <p:cNvPr id="3" name="Picture 2">
+            <a:extLst>
+              <a:ext uri="{FF2B5EF4-FFF2-40B4-BE49-F238E27FC236}">
+                <a16:creationId xmlns:a16="http://schemas.microsoft.com/office/drawing/2014/main" id="{764C5F03-5284-1199-21E6-73F2DB8D3930}"/>
+              </a:ext>
+            </a:extLst>
+          </p:cNvPr>
+          <p:cNvPicPr>
+            <a:picLocks noChangeAspect="1"/>
+          </p:cNvPicPr>
+          <p:nvPr/>
+        </p:nvPicPr>
+        <p:blipFill>
+          <a:blip r:embed="rId2">
+            <a:extLst>
+              <a:ext uri="{28A0092B-C50C-407E-A947-70E740481C1C}">
+                <a14:useLocalDpi xmlns:a14="http://schemas.microsoft.com/office/drawing/2010/main" val="0"/>
+              </a:ext>
+            </a:extLst>
+          </a:blip>
+          <a:srcRect/>
+          <a:stretch/>
+        </p:blipFill>
+        <p:spPr>
+          <a:xfrm>
+            <a:off x="1519259" y="1562100"/>
+            <a:ext cx="15249480" cy="6342840"/>
+          </a:xfrm>
+          <a:prstGeom prst="rect">
+            <a:avLst/>
+          </a:prstGeom>
+          <a:ln>
+            <a:noFill/>
+          </a:ln>
+          <a:effectLst>
+            <a:outerShdw blurRad="149987" dist="250190" dir="8460000" algn="ctr">
+              <a:srgbClr val="000000">
+                <a:alpha val="28000"/>
+              </a:srgbClr>
+            </a:outerShdw>
+          </a:effectLst>
+          <a:scene3d>
+            <a:camera prst="orthographicFront">
+              <a:rot lat="0" lon="0" rev="0"/>
+            </a:camera>
+            <a:lightRig rig="contrasting" dir="t">
+              <a:rot lat="0" lon="0" rev="1500000"/>
+            </a:lightRig>
+          </a:scene3d>
+          <a:sp3d prstMaterial="metal">
+            <a:bevelT w="88900" h="88900"/>
+          </a:sp3d>
+        </p:spPr>
+      </p:pic>
+      <p:sp>
+        <p:nvSpPr>
+          <p:cNvPr id="4" name="Google Shape;39;p2">
+            <a:extLst>
+              <a:ext uri="{FF2B5EF4-FFF2-40B4-BE49-F238E27FC236}">
+                <a16:creationId xmlns:a16="http://schemas.microsoft.com/office/drawing/2014/main" id="{07D06A95-A758-DB7C-0369-E46BC4571108}"/>
+              </a:ext>
+            </a:extLst>
+          </p:cNvPr>
+          <p:cNvSpPr/>
+          <p:nvPr/>
+        </p:nvSpPr>
+        <p:spPr>
+          <a:xfrm>
+            <a:off x="1519258" y="342900"/>
+            <a:ext cx="8005741" cy="1015663"/>
+          </a:xfrm>
+          <a:prstGeom prst="rect">
+            <a:avLst/>
+          </a:prstGeom>
+          <a:noFill/>
+          <a:ln>
+            <a:noFill/>
+          </a:ln>
+        </p:spPr>
+        <p:txBody>
+          <a:bodyPr spcFirstLastPara="1" wrap="square" lIns="0" tIns="0" rIns="0" bIns="0" anchor="t" anchorCtr="0">
+            <a:spAutoFit/>
+          </a:bodyPr>
+          <a:lstStyle/>
+          <a:p>
+            <a:r>
+              <a:rPr lang="en-US" sz="6600" dirty="0">
+                <a:solidFill>
+                  <a:schemeClr val="lt1"/>
+                </a:solidFill>
+                <a:ea typeface="Calibri"/>
+                <a:cs typeface="Calibri"/>
+              </a:rPr>
+              <a:t>Admin Displays Events</a:t>
+            </a:r>
+          </a:p>
+        </p:txBody>
+      </p:sp>
+    </p:spTree>
+    <p:extLst>
+      <p:ext uri="{BB962C8B-B14F-4D97-AF65-F5344CB8AC3E}">
+        <p14:creationId xmlns:p14="http://schemas.microsoft.com/office/powerpoint/2010/main" val="928098450"/>
+      </p:ext>
+    </p:extLst>
+  </p:cSld>
+  <p:clrMapOvr>
+    <a:masterClrMapping/>
+  </p:clrMapOvr>
+  <mc:AlternateContent xmlns:mc="http://schemas.openxmlformats.org/markup-compatibility/2006">
+    <mc:Choice xmlns:p14="http://schemas.microsoft.com/office/powerpoint/2010/main" Requires="p14">
+      <p:transition spd="med" p14:dur="700">
+        <p:fade/>
+      </p:transition>
+    </mc:Choice>
+    <mc:Fallback>
+      <p:transition spd="med">
+        <p:fade/>
+      </p:transition>
+    </mc:Fallback>
+  </mc:AlternateContent>
+  <p:timing>
+    <p:tnLst>
+      <p:par>
+        <p:cTn id="1" dur="indefinite" restart="never" nodeType="tmRoot">
+          <p:childTnLst>
+            <p:seq concurrent="1" nextAc="seek">
+              <p:cTn id="2" dur="indefinite" nodeType="mainSeq">
+                <p:childTnLst>
+                  <p:par>
+                    <p:cTn id="3" fill="hold">
+                      <p:stCondLst>
+                        <p:cond delay="indefinite"/>
+                        <p:cond evt="onBegin" delay="0">
+                          <p:tn val="2"/>
+                        </p:cond>
+                      </p:stCondLst>
+                      <p:childTnLst>
+                        <p:par>
+                          <p:cTn id="4" fill="hold">
+                            <p:stCondLst>
+                              <p:cond delay="0"/>
+                            </p:stCondLst>
+                            <p:childTnLst>
+                              <p:par>
+                                <p:cTn id="5" presetID="22" presetClass="entr" presetSubtype="8" fill="hold" grpId="0" nodeType="withEffect">
+                                  <p:stCondLst>
+                                    <p:cond delay="0"/>
+                                  </p:stCondLst>
+                                  <p:childTnLst>
+                                    <p:set>
+                                      <p:cBhvr>
+                                        <p:cTn id="6" dur="1" fill="hold">
+                                          <p:stCondLst>
+                                            <p:cond delay="0"/>
+                                          </p:stCondLst>
+                                        </p:cTn>
+                                        <p:tgtEl>
+                                          <p:spTgt spid="4"/>
+                                        </p:tgtEl>
+                                        <p:attrNameLst>
+                                          <p:attrName>style.visibility</p:attrName>
+                                        </p:attrNameLst>
+                                      </p:cBhvr>
+                                      <p:to>
+                                        <p:strVal val="visible"/>
+                                      </p:to>
+                                    </p:set>
+                                    <p:animEffect transition="in" filter="wipe(left)">
+                                      <p:cBhvr>
+                                        <p:cTn id="7" dur="950"/>
+                                        <p:tgtEl>
+                                          <p:spTgt spid="4"/>
+                                        </p:tgtEl>
+                                      </p:cBhvr>
+                                    </p:animEffect>
+                                  </p:childTnLst>
+                                </p:cTn>
+                              </p:par>
+                              <p:par>
+                                <p:cTn id="8" presetID="22" presetClass="entr" presetSubtype="8" fill="hold" nodeType="withEffect">
+                                  <p:stCondLst>
+                                    <p:cond delay="0"/>
+                                  </p:stCondLst>
+                                  <p:childTnLst>
+                                    <p:set>
+                                      <p:cBhvr>
+                                        <p:cTn id="9" dur="1" fill="hold">
+                                          <p:stCondLst>
+                                            <p:cond delay="0"/>
+                                          </p:stCondLst>
+                                        </p:cTn>
+                                        <p:tgtEl>
+                                          <p:spTgt spid="3"/>
+                                        </p:tgtEl>
+                                        <p:attrNameLst>
+                                          <p:attrName>style.visibility</p:attrName>
+                                        </p:attrNameLst>
+                                      </p:cBhvr>
+                                      <p:to>
+                                        <p:strVal val="visible"/>
+                                      </p:to>
+                                    </p:set>
+                                    <p:animEffect transition="in" filter="wipe(left)">
+                                      <p:cBhvr>
+                                        <p:cTn id="10" dur="1000"/>
+                                        <p:tgtEl>
+                                          <p:spTgt spid="3"/>
+                                        </p:tgtEl>
+                                      </p:cBhvr>
+                                    </p:animEffect>
+                                  </p:childTnLst>
+                                </p:cTn>
+                              </p:par>
+                            </p:childTnLst>
+                          </p:cTn>
+                        </p:par>
+                      </p:childTnLst>
+                    </p:cTn>
+                  </p:par>
+                </p:childTnLst>
+              </p:cTn>
+              <p:prevCondLst>
+                <p:cond evt="onPrev" delay="0">
+                  <p:tgtEl>
+                    <p:sldTgt/>
+                  </p:tgtEl>
+                </p:cond>
+              </p:prevCondLst>
+              <p:nextCondLst>
+                <p:cond evt="onNext" delay="0">
+                  <p:tgtEl>
+                    <p:sldTgt/>
+                  </p:tgtEl>
+                </p:cond>
+              </p:nextCondLst>
+            </p:seq>
+          </p:childTnLst>
+        </p:cTn>
+      </p:par>
+    </p:tnLst>
+    <p:bldLst>
+      <p:bldP spid="4" grpId="0"/>
+    </p:bldLst>
+  </p:timing>
+</p:sld>
+</file>
+
+<file path=ppt/slides/slide28.xml><?xml version="1.0" encoding="utf-8"?>
+<p:sld xmlns:a="http://schemas.openxmlformats.org/drawingml/2006/main" xmlns:r="http://schemas.openxmlformats.org/officeDocument/2006/relationships" xmlns:p="http://schemas.openxmlformats.org/presentationml/2006/main">
+  <p:cSld>
+    <p:spTree>
+      <p:nvGrpSpPr>
+        <p:cNvPr id="1" name=""/>
+        <p:cNvGrpSpPr/>
+        <p:nvPr/>
+      </p:nvGrpSpPr>
+      <p:grpSpPr>
+        <a:xfrm>
+          <a:off x="0" y="0"/>
+          <a:ext cx="0" cy="0"/>
+          <a:chOff x="0" y="0"/>
+          <a:chExt cx="0" cy="0"/>
+        </a:xfrm>
+      </p:grpSpPr>
       <p:sp>
         <p:nvSpPr>
           <p:cNvPr id="5" name="TextBox 4">
@@ -13894,7 +15976,7 @@
         <p:spPr>
           <a:xfrm>
             <a:off x="1066800" y="2705100"/>
-            <a:ext cx="16306800" cy="6370975"/>
+            <a:ext cx="16306800" cy="5632311"/>
           </a:xfrm>
           <a:prstGeom prst="rect">
             <a:avLst/>
@@ -13912,36 +15994,12 @@
               <a:buChar char="•"/>
             </a:pPr>
             <a:r>
-              <a:rPr lang="en-US" sz="2400" dirty="0" err="1">
+              <a:rPr lang="en-US" altLang="en-US" sz="2400" dirty="0">
                 <a:solidFill>
                   <a:schemeClr val="bg1"/>
                 </a:solidFill>
               </a:rPr>
-              <a:t>LibraryItem</a:t>
-            </a:r>
-            <a:r>
-              <a:rPr lang="en-US" sz="2400" dirty="0">
-                <a:solidFill>
-                  <a:schemeClr val="bg1"/>
-                </a:solidFill>
-              </a:rPr>
-              <a:t> (Base Class): The core abstract blueprint containing universal attributes for all inventory items, including title, </a:t>
-            </a:r>
-            <a:r>
-              <a:rPr lang="en-US" sz="2400" dirty="0" err="1">
-                <a:solidFill>
-                  <a:schemeClr val="bg1"/>
-                </a:solidFill>
-              </a:rPr>
-              <a:t>item_id</a:t>
-            </a:r>
-            <a:r>
-              <a:rPr lang="en-US" sz="2400" dirty="0">
-                <a:solidFill>
-                  <a:schemeClr val="bg1"/>
-                </a:solidFill>
-              </a:rPr>
-              <a:t>, category, and status ("Available" or "Borrowed").</a:t>
+              <a:t>Object-Oriented Entity Structure: Designed dedicated Python classes (such as Event) to encapsulate attributes like name, trainer, location, price, duration, rating, available seats, and category. </a:t>
             </a:r>
           </a:p>
           <a:p>
@@ -13966,7 +16024,7 @@
                   <a:schemeClr val="bg1"/>
                 </a:solidFill>
               </a:rPr>
-              <a:t>Book (Subclass): Extends </a:t>
+              <a:t>Persistent JSON Data Stores: Utilized structured JSON files (</a:t>
             </a:r>
             <a:r>
               <a:rPr lang="en-US" sz="2400" dirty="0" err="1">
@@ -13974,7 +16032,7 @@
                   <a:schemeClr val="bg1"/>
                 </a:solidFill>
               </a:rPr>
-              <a:t>LibraryItem</a:t>
+              <a:t>events.json</a:t>
             </a:r>
             <a:r>
               <a:rPr lang="en-US" sz="2400" dirty="0">
@@ -13982,7 +16040,7 @@
                   <a:schemeClr val="bg1"/>
                 </a:solidFill>
               </a:rPr>
-              <a:t> with specific literary attributes including </a:t>
+              <a:t> and </a:t>
             </a:r>
             <a:r>
               <a:rPr lang="en-US" sz="2400" dirty="0" err="1">
@@ -13990,7 +16048,7 @@
                   <a:schemeClr val="bg1"/>
                 </a:solidFill>
               </a:rPr>
-              <a:t>isbn</a:t>
+              <a:t>users.json</a:t>
             </a:r>
             <a:r>
               <a:rPr lang="en-US" sz="2400" dirty="0">
@@ -13998,7 +16056,7 @@
                   <a:schemeClr val="bg1"/>
                 </a:solidFill>
               </a:rPr>
-              <a:t>, author, and pages for complete book cataloging.</a:t>
+              <a:t>) to store and retrieve application records permanently, ensuring data integrity across sessions.</a:t>
             </a:r>
           </a:p>
           <a:p>
@@ -14023,7 +16081,7 @@
                   <a:schemeClr val="bg1"/>
                 </a:solidFill>
               </a:rPr>
-              <a:t>Magazine (Subclass): Extends </a:t>
+              <a:t>Manager &amp; Controller Classes: Implemented dedicated logic containers like </a:t>
             </a:r>
             <a:r>
               <a:rPr lang="en-US" sz="2400" dirty="0" err="1">
@@ -14031,7 +16089,7 @@
                   <a:schemeClr val="bg1"/>
                 </a:solidFill>
               </a:rPr>
-              <a:t>LibraryItem</a:t>
+              <a:t>EventManager</a:t>
             </a:r>
             <a:r>
               <a:rPr lang="en-US" sz="2400" dirty="0">
@@ -14039,7 +16097,7 @@
                   <a:schemeClr val="bg1"/>
                 </a:solidFill>
               </a:rPr>
-              <a:t> to manage periodical assets, incorporating specific fields such as </a:t>
+              <a:t> and </a:t>
             </a:r>
             <a:r>
               <a:rPr lang="en-US" sz="2400" dirty="0" err="1">
@@ -14047,7 +16105,7 @@
                   <a:schemeClr val="bg1"/>
                 </a:solidFill>
               </a:rPr>
-              <a:t>issue_number</a:t>
+              <a:t>LearningPlan</a:t>
             </a:r>
             <a:r>
               <a:rPr lang="en-US" sz="2400" dirty="0">
@@ -14055,89 +16113,13 @@
                   <a:schemeClr val="bg1"/>
                 </a:solidFill>
               </a:rPr>
-              <a:t> and publisher.</a:t>
+              <a:t> to handle lists of objects, manage business rules, and execute CRUD operations.</a:t>
             </a:r>
-          </a:p>
-          <a:p>
-            <a:pPr marL="342900" indent="-342900">
-              <a:buFont typeface="Arial" panose="020B0604020202020204" pitchFamily="34" charset="0"/>
-              <a:buChar char="•"/>
-            </a:pPr>
-            <a:endParaRPr lang="en-US" sz="2400" dirty="0">
+            <a:endParaRPr lang="ar-EG" sz="2400" dirty="0">
               <a:solidFill>
                 <a:schemeClr val="bg1"/>
               </a:solidFill>
             </a:endParaRPr>
-          </a:p>
-          <a:p>
-            <a:pPr marL="342900" indent="-342900">
-              <a:buFont typeface="Arial" panose="020B0604020202020204" pitchFamily="34" charset="0"/>
-              <a:buChar char="•"/>
-            </a:pPr>
-            <a:r>
-              <a:rPr lang="en-US" sz="2400" dirty="0" err="1">
-                <a:solidFill>
-                  <a:schemeClr val="bg1"/>
-                </a:solidFill>
-              </a:rPr>
-              <a:t>DigitalResource</a:t>
-            </a:r>
-            <a:r>
-              <a:rPr lang="en-US" sz="2400" dirty="0">
-                <a:solidFill>
-                  <a:schemeClr val="bg1"/>
-                </a:solidFill>
-              </a:rPr>
-              <a:t> (Subclass): Extends </a:t>
-            </a:r>
-            <a:r>
-              <a:rPr lang="en-US" sz="2400" dirty="0" err="1">
-                <a:solidFill>
-                  <a:schemeClr val="bg1"/>
-                </a:solidFill>
-              </a:rPr>
-              <a:t>LibraryItem</a:t>
-            </a:r>
-            <a:r>
-              <a:rPr lang="en-US" sz="2400" dirty="0">
-                <a:solidFill>
-                  <a:schemeClr val="bg1"/>
-                </a:solidFill>
-              </a:rPr>
-              <a:t> for modern assets, storing digital-specific attributes like </a:t>
-            </a:r>
-            <a:r>
-              <a:rPr lang="en-US" sz="2400" dirty="0" err="1">
-                <a:solidFill>
-                  <a:schemeClr val="bg1"/>
-                </a:solidFill>
-              </a:rPr>
-              <a:t>file_size</a:t>
-            </a:r>
-            <a:r>
-              <a:rPr lang="en-US" sz="2400" dirty="0">
-                <a:solidFill>
-                  <a:schemeClr val="bg1"/>
-                </a:solidFill>
-              </a:rPr>
-              <a:t> (in MB) and </a:t>
-            </a:r>
-            <a:r>
-              <a:rPr lang="en-US" sz="2400" dirty="0" err="1">
-                <a:solidFill>
-                  <a:schemeClr val="bg1"/>
-                </a:solidFill>
-              </a:rPr>
-              <a:t>download_link</a:t>
-            </a:r>
-            <a:r>
-              <a:rPr lang="en-US" sz="2400" dirty="0">
-                <a:solidFill>
-                  <a:schemeClr val="bg1"/>
-                </a:solidFill>
-              </a:rPr>
-              <a:t>.</a:t>
-            </a:r>
           </a:p>
           <a:p>
             <a:pPr marL="342900" indent="-342900">
@@ -14161,40 +16143,13 @@
                   <a:schemeClr val="bg1"/>
                 </a:solidFill>
               </a:rPr>
-              <a:t>Member (Entity Class): Manages user profiles containing </a:t>
+              <a:t>Role-Based User Schema: Structured user records with specific attributes (name, email, phone, age, gender, governorate, national ID, password, and role) to differentiate between standard users and administrators.</a:t>
             </a:r>
-            <a:r>
-              <a:rPr lang="en-US" sz="2400" dirty="0" err="1">
-                <a:solidFill>
-                  <a:schemeClr val="bg1"/>
-                </a:solidFill>
-              </a:rPr>
-              <a:t>member_id</a:t>
-            </a:r>
-            <a:r>
-              <a:rPr lang="en-US" sz="2400" dirty="0">
-                <a:solidFill>
-                  <a:schemeClr val="bg1"/>
-                </a:solidFill>
-              </a:rPr>
-              <a:t>, name, email, password, role assignment (admin or customer), and a tracking list for </a:t>
-            </a:r>
-            <a:r>
-              <a:rPr lang="en-US" sz="2400" dirty="0" err="1">
-                <a:solidFill>
-                  <a:schemeClr val="bg1"/>
-                </a:solidFill>
-              </a:rPr>
-              <a:t>borrowed_items</a:t>
-            </a:r>
-            <a:r>
-              <a:rPr lang="en-US" sz="2400" dirty="0">
-                <a:solidFill>
-                  <a:schemeClr val="bg1"/>
-                </a:solidFill>
-              </a:rPr>
-              <a:t>.</a:t>
-            </a:r>
+            <a:endParaRPr lang="ar-EG" sz="2400" dirty="0">
+              <a:solidFill>
+                <a:schemeClr val="bg1"/>
+              </a:solidFill>
+            </a:endParaRPr>
           </a:p>
           <a:p>
             <a:pPr marL="342900" indent="-342900">
@@ -14218,7 +16173,7 @@
                   <a:schemeClr val="bg1"/>
                 </a:solidFill>
               </a:rPr>
-              <a:t>JSON Persistent Storage Schema: Structured relational-like JSON schema (</a:t>
+              <a:t>Custom Navigation &amp; Sorting Models: Handled state and ordering dynamically through dedicated algorithmic structures like the </a:t>
             </a:r>
             <a:r>
               <a:rPr lang="en-US" sz="2400" dirty="0" err="1">
@@ -14226,7 +16181,7 @@
                   <a:schemeClr val="bg1"/>
                 </a:solidFill>
               </a:rPr>
-              <a:t>library_system.json</a:t>
+              <a:t>NavigationStack</a:t>
             </a:r>
             <a:r>
               <a:rPr lang="en-US" sz="2400" dirty="0">
@@ -14234,8 +16189,35 @@
                   <a:schemeClr val="bg1"/>
                 </a:solidFill>
               </a:rPr>
-              <a:t>) mapping serialized members arrays and polymorphic items lists with dynamic type mapping.</a:t>
+              <a:t> history tracker and the </a:t>
             </a:r>
+            <a:r>
+              <a:rPr lang="en-US" sz="2400" dirty="0" err="1">
+                <a:solidFill>
+                  <a:schemeClr val="bg1"/>
+                </a:solidFill>
+              </a:rPr>
+              <a:t>MergeSort</a:t>
+            </a:r>
+            <a:r>
+              <a:rPr lang="en-US" sz="2400" dirty="0">
+                <a:solidFill>
+                  <a:schemeClr val="bg1"/>
+                </a:solidFill>
+              </a:rPr>
+              <a:t> data sorter.</a:t>
+            </a:r>
+          </a:p>
+          <a:p>
+            <a:pPr marL="342900" indent="-342900">
+              <a:buFont typeface="Arial" panose="020B0604020202020204" pitchFamily="34" charset="0"/>
+              <a:buChar char="•"/>
+            </a:pPr>
+            <a:endParaRPr lang="en-US" sz="2400" dirty="0">
+              <a:solidFill>
+                <a:schemeClr val="bg1"/>
+              </a:solidFill>
+            </a:endParaRPr>
           </a:p>
         </p:txBody>
       </p:sp>
@@ -14353,7 +16335,7 @@
 </p:sld>
 </file>
 
-<file path=ppt/slides/slide21.xml><?xml version="1.0" encoding="utf-8"?>
+<file path=ppt/slides/slide29.xml><?xml version="1.0" encoding="utf-8"?>
 <p:sld xmlns:a="http://schemas.openxmlformats.org/drawingml/2006/main" xmlns:r="http://schemas.openxmlformats.org/officeDocument/2006/relationships" xmlns:p="http://schemas.openxmlformats.org/presentationml/2006/main">
   <p:cSld>
     <p:spTree>
@@ -14446,11 +16428,11 @@
             </a:pPr>
             <a:r>
               <a:rPr lang="en-US" sz="3200" b="1" dirty="0"/>
-              <a:t>Fully Functional Core:</a:t>
+              <a:t>Successful System Integration:</a:t>
             </a:r>
             <a:r>
               <a:rPr lang="en-US" sz="3200" dirty="0"/>
-              <a:t> Delivered a robust, production-ready command-line library system integrating OOP, closures, and regex validation.</a:t>
+              <a:t> Delivered a fully functional CLI-based platform that seamlessly integrates user authentication, administrative controls, and personalized learning plans with persistent JSON storage.</a:t>
             </a:r>
           </a:p>
           <a:p>
@@ -14466,23 +16448,13 @@
             </a:pPr>
             <a:r>
               <a:rPr lang="en-US" sz="3200" b="1" dirty="0"/>
-              <a:t>Enhanced Security &amp; UX:</a:t>
+              <a:t>Algorithmic Efficiency:</a:t>
             </a:r>
             <a:r>
               <a:rPr lang="en-US" sz="3200" dirty="0"/>
-              <a:t> </a:t>
+              <a:t> Validated the practical application of manual data structures and algorithms—specifically utilizing Merge Sort for quick event organization and recursive logic for instant financial summaries.</a:t>
             </a:r>
-            <a:r>
-              <a:rPr lang="en-US" sz="3200" dirty="0">
-                <a:solidFill>
-                  <a:srgbClr val="404040"/>
-                </a:solidFill>
-                <a:latin typeface="Arial"/>
-                <a:ea typeface="Arial"/>
-                <a:cs typeface="Arial"/>
-              </a:rPr>
-              <a:t>Prevented unauthorized access, role bypasses, and concurrent multi-logins through strict session controls and color-coded CLI feedback.</a:t>
-            </a:r>
+            <a:endParaRPr lang="ar-EG" sz="3200" dirty="0"/>
           </a:p>
           <a:p>
             <a:pPr marL="457200" indent="-457200">
@@ -14497,11 +16469,11 @@
             </a:pPr>
             <a:r>
               <a:rPr lang="en-US" sz="3200" b="1" dirty="0"/>
-              <a:t>Data Reliability:</a:t>
+              <a:t>Enhanced User Experience:</a:t>
             </a:r>
             <a:r>
               <a:rPr lang="en-US" sz="3200" dirty="0"/>
-              <a:t> Successfully automated local persistence, ensuring zero data loss and seamless synchronization via structured JSON storage.</a:t>
+              <a:t> Streamlined event discovery and navigation through category filtering, keyword searches, and dynamic seat management, providing a robust tool for educational planning. </a:t>
             </a:r>
           </a:p>
         </p:txBody>
@@ -14612,507 +16584,6 @@
       <p:bldP spid="3" grpId="0"/>
     </p:bldLst>
   </p:timing>
-</p:sld>
-</file>
-
-<file path=ppt/slides/slide22.xml><?xml version="1.0" encoding="utf-8"?>
-<p:sld xmlns:a="http://schemas.openxmlformats.org/drawingml/2006/main" xmlns:r="http://schemas.openxmlformats.org/officeDocument/2006/relationships" xmlns:p="http://schemas.openxmlformats.org/presentationml/2006/main">
-  <p:cSld>
-    <p:spTree>
-      <p:nvGrpSpPr>
-        <p:cNvPr id="1" name=""/>
-        <p:cNvGrpSpPr/>
-        <p:nvPr/>
-      </p:nvGrpSpPr>
-      <p:grpSpPr>
-        <a:xfrm>
-          <a:off x="0" y="0"/>
-          <a:ext cx="0" cy="0"/>
-          <a:chOff x="0" y="0"/>
-          <a:chExt cx="0" cy="0"/>
-        </a:xfrm>
-      </p:grpSpPr>
-      <p:sp>
-        <p:nvSpPr>
-          <p:cNvPr id="2" name="Title"/>
-          <p:cNvSpPr/>
-          <p:nvPr/>
-        </p:nvSpPr>
-        <p:spPr>
-          <a:xfrm>
-            <a:off x="1200150" y="700000"/>
-            <a:ext cx="15887700" cy="900000"/>
-          </a:xfrm>
-          <a:prstGeom prst="rect">
-            <a:avLst/>
-          </a:prstGeom>
-          <a:noFill/>
-          <a:ln>
-            <a:noFill/>
-          </a:ln>
-        </p:spPr>
-        <p:txBody>
-          <a:bodyPr wrap="square" lIns="0" tIns="0" rIns="0" bIns="0" anchor="t">
-            <a:noAutofit/>
-          </a:bodyPr>
-          <a:lstStyle/>
-          <a:p>
-            <a:r>
-              <a:rPr lang="en-US" sz="4000" b="1" dirty="0">
-                <a:solidFill>
-                  <a:srgbClr val="193EB0"/>
-                </a:solidFill>
-                <a:latin typeface="Arial"/>
-                <a:ea typeface="Arial"/>
-                <a:cs typeface="Arial"/>
-              </a:rPr>
-              <a:t>Conclusion</a:t>
-            </a:r>
-          </a:p>
-        </p:txBody>
-      </p:sp>
-      <p:sp>
-        <p:nvSpPr>
-          <p:cNvPr id="3" name="Content"/>
-          <p:cNvSpPr/>
-          <p:nvPr/>
-        </p:nvSpPr>
-        <p:spPr>
-          <a:xfrm>
-            <a:off x="1187450" y="876300"/>
-            <a:ext cx="15887700" cy="7687000"/>
-          </a:xfrm>
-          <a:prstGeom prst="rect">
-            <a:avLst/>
-          </a:prstGeom>
-          <a:noFill/>
-          <a:ln>
-            <a:noFill/>
-          </a:ln>
-        </p:spPr>
-        <p:txBody>
-          <a:bodyPr wrap="square" lIns="0" tIns="0" rIns="0" bIns="0" anchor="ctr">
-            <a:normAutofit/>
-          </a:bodyPr>
-          <a:lstStyle/>
-          <a:p>
-            <a:pPr marL="457200" indent="-457200">
-              <a:spcAft>
-                <a:spcPts val="1600"/>
-              </a:spcAft>
-              <a:buClr>
-                <a:srgbClr val="193EB0"/>
-              </a:buClr>
-              <a:buFont typeface="Arial"/>
-              <a:buChar char="●"/>
-            </a:pPr>
-            <a:r>
-              <a:rPr lang="en-US" sz="3200" b="1" dirty="0">
-                <a:latin typeface="Arial"/>
-                <a:ea typeface="Arial"/>
-                <a:cs typeface="Arial"/>
-              </a:rPr>
-              <a:t>Successful Delivery: </a:t>
-            </a:r>
-            <a:r>
-              <a:rPr lang="en-US" sz="3200" dirty="0">
-                <a:solidFill>
-                  <a:srgbClr val="404040"/>
-                </a:solidFill>
-                <a:latin typeface="Arial"/>
-                <a:ea typeface="Arial"/>
-                <a:cs typeface="Arial"/>
-              </a:rPr>
-              <a:t>Built a robust, production-ready command-line library system integrating OOP architecture, closures, and regex validation as part of the Samsung Innovation Campus program.</a:t>
-            </a:r>
-          </a:p>
-          <a:p>
-            <a:pPr marL="457200" indent="-457200">
-              <a:spcAft>
-                <a:spcPts val="1600"/>
-              </a:spcAft>
-              <a:buClr>
-                <a:srgbClr val="193EB0"/>
-              </a:buClr>
-              <a:buFont typeface="Arial"/>
-              <a:buChar char="●"/>
-            </a:pPr>
-            <a:r>
-              <a:rPr lang="en-US" sz="3200" b="1" dirty="0"/>
-              <a:t>Core Value &amp; Future Scope: </a:t>
-            </a:r>
-            <a:r>
-              <a:rPr lang="en-US" sz="3200" dirty="0"/>
-              <a:t>Successfully automated inventory tracking, role-based security, and persistent JSON storage, providing a scalable foundation for future enhancements like a graphical interface. </a:t>
-            </a:r>
-            <a:endParaRPr lang="en-US" sz="3200" dirty="0">
-              <a:solidFill>
-                <a:srgbClr val="404040"/>
-              </a:solidFill>
-              <a:latin typeface="Arial"/>
-              <a:ea typeface="Arial"/>
-              <a:cs typeface="Arial"/>
-            </a:endParaRPr>
-          </a:p>
-        </p:txBody>
-      </p:sp>
-    </p:spTree>
-  </p:cSld>
-  <p:clrMapOvr>
-    <a:masterClrMapping/>
-  </p:clrMapOvr>
-  <mc:AlternateContent xmlns:mc="http://schemas.openxmlformats.org/markup-compatibility/2006" xmlns:p14="http://schemas.microsoft.com/office/powerpoint/2010/main">
-    <mc:Choice Requires="p14">
-      <p:transition spd="med" p14:dur="700">
-        <p:fade/>
-      </p:transition>
-    </mc:Choice>
-    <mc:Fallback xmlns="">
-      <p:transition spd="med">
-        <p:fade/>
-      </p:transition>
-    </mc:Fallback>
-  </mc:AlternateContent>
-  <p:timing>
-    <p:tnLst>
-      <p:par>
-        <p:cTn id="1" dur="indefinite" restart="never" nodeType="tmRoot">
-          <p:childTnLst>
-            <p:seq concurrent="1" nextAc="seek">
-              <p:cTn id="2" dur="indefinite" nodeType="mainSeq">
-                <p:childTnLst>
-                  <p:par>
-                    <p:cTn id="3" fill="hold">
-                      <p:stCondLst>
-                        <p:cond delay="indefinite"/>
-                        <p:cond evt="onBegin" delay="0">
-                          <p:tn val="2"/>
-                        </p:cond>
-                      </p:stCondLst>
-                      <p:childTnLst>
-                        <p:par>
-                          <p:cTn id="4" fill="hold">
-                            <p:stCondLst>
-                              <p:cond delay="0"/>
-                            </p:stCondLst>
-                            <p:childTnLst>
-                              <p:par>
-                                <p:cTn id="5" presetID="22" presetClass="entr" presetSubtype="1" fill="hold" grpId="0" nodeType="withEffect">
-                                  <p:stCondLst>
-                                    <p:cond delay="0"/>
-                                  </p:stCondLst>
-                                  <p:childTnLst>
-                                    <p:set>
-                                      <p:cBhvr>
-                                        <p:cTn id="6" dur="1" fill="hold">
-                                          <p:stCondLst>
-                                            <p:cond delay="0"/>
-                                          </p:stCondLst>
-                                        </p:cTn>
-                                        <p:tgtEl>
-                                          <p:spTgt spid="3"/>
-                                        </p:tgtEl>
-                                        <p:attrNameLst>
-                                          <p:attrName>style.visibility</p:attrName>
-                                        </p:attrNameLst>
-                                      </p:cBhvr>
-                                      <p:to>
-                                        <p:strVal val="visible"/>
-                                      </p:to>
-                                    </p:set>
-                                    <p:animEffect transition="in" filter="wipe(up)">
-                                      <p:cBhvr>
-                                        <p:cTn id="7" dur="1000"/>
-                                        <p:tgtEl>
-                                          <p:spTgt spid="3"/>
-                                        </p:tgtEl>
-                                      </p:cBhvr>
-                                    </p:animEffect>
-                                  </p:childTnLst>
-                                </p:cTn>
-                              </p:par>
-                            </p:childTnLst>
-                          </p:cTn>
-                        </p:par>
-                      </p:childTnLst>
-                    </p:cTn>
-                  </p:par>
-                </p:childTnLst>
-              </p:cTn>
-              <p:prevCondLst>
-                <p:cond evt="onPrev" delay="0">
-                  <p:tgtEl>
-                    <p:sldTgt/>
-                  </p:tgtEl>
-                </p:cond>
-              </p:prevCondLst>
-              <p:nextCondLst>
-                <p:cond evt="onNext" delay="0">
-                  <p:tgtEl>
-                    <p:sldTgt/>
-                  </p:tgtEl>
-                </p:cond>
-              </p:nextCondLst>
-            </p:seq>
-          </p:childTnLst>
-        </p:cTn>
-      </p:par>
-    </p:tnLst>
-    <p:bldLst>
-      <p:bldP spid="3" grpId="0"/>
-    </p:bldLst>
-  </p:timing>
-</p:sld>
-</file>
-
-<file path=ppt/slides/slide23.xml><?xml version="1.0" encoding="utf-8"?>
-<p:sld xmlns:a="http://schemas.openxmlformats.org/drawingml/2006/main" xmlns:r="http://schemas.openxmlformats.org/officeDocument/2006/relationships" xmlns:p="http://schemas.openxmlformats.org/presentationml/2006/main">
-  <p:cSld>
-    <p:spTree>
-      <p:nvGrpSpPr>
-        <p:cNvPr id="1" name=""/>
-        <p:cNvGrpSpPr/>
-        <p:nvPr/>
-      </p:nvGrpSpPr>
-      <p:grpSpPr>
-        <a:xfrm>
-          <a:off x="0" y="0"/>
-          <a:ext cx="0" cy="0"/>
-          <a:chOff x="0" y="0"/>
-          <a:chExt cx="0" cy="0"/>
-        </a:xfrm>
-      </p:grpSpPr>
-      <p:sp>
-        <p:nvSpPr>
-          <p:cNvPr id="2" name="Title"/>
-          <p:cNvSpPr/>
-          <p:nvPr/>
-        </p:nvSpPr>
-        <p:spPr>
-          <a:xfrm>
-            <a:off x="1200150" y="700000"/>
-            <a:ext cx="15887700" cy="900000"/>
-          </a:xfrm>
-          <a:prstGeom prst="rect">
-            <a:avLst/>
-          </a:prstGeom>
-          <a:noFill/>
-          <a:ln>
-            <a:noFill/>
-          </a:ln>
-        </p:spPr>
-        <p:txBody>
-          <a:bodyPr wrap="square" lIns="0" tIns="0" rIns="0" bIns="0" anchor="t">
-            <a:noAutofit/>
-          </a:bodyPr>
-          <a:lstStyle/>
-          <a:p>
-            <a:r>
-              <a:rPr lang="en-US" sz="5000" b="1" dirty="0">
-                <a:solidFill>
-                  <a:srgbClr val="193EB0"/>
-                </a:solidFill>
-                <a:latin typeface="Arial"/>
-                <a:ea typeface="Arial"/>
-                <a:cs typeface="Arial"/>
-              </a:rPr>
-              <a:t>Q&amp;A</a:t>
-            </a:r>
-          </a:p>
-        </p:txBody>
-      </p:sp>
-      <p:sp>
-        <p:nvSpPr>
-          <p:cNvPr id="3" name="Content"/>
-          <p:cNvSpPr/>
-          <p:nvPr/>
-        </p:nvSpPr>
-        <p:spPr>
-          <a:xfrm>
-            <a:off x="1200150" y="1900000"/>
-            <a:ext cx="15887700" cy="5119392"/>
-          </a:xfrm>
-          <a:prstGeom prst="rect">
-            <a:avLst/>
-          </a:prstGeom>
-          <a:noFill/>
-          <a:ln>
-            <a:noFill/>
-          </a:ln>
-        </p:spPr>
-        <p:txBody>
-          <a:bodyPr wrap="square" lIns="0" tIns="0" rIns="0" bIns="0" anchor="ctr">
-            <a:normAutofit/>
-          </a:bodyPr>
-          <a:lstStyle/>
-          <a:p>
-            <a:pPr marL="457200" indent="-457200">
-              <a:spcAft>
-                <a:spcPts val="1600"/>
-              </a:spcAft>
-              <a:buClr>
-                <a:srgbClr val="193EB0"/>
-              </a:buClr>
-              <a:buFont typeface="Arial"/>
-              <a:buChar char="●"/>
-            </a:pPr>
-            <a:r>
-              <a:rPr lang="en-US" sz="4000" dirty="0">
-                <a:solidFill>
-                  <a:srgbClr val="404040"/>
-                </a:solidFill>
-                <a:latin typeface="Arial"/>
-                <a:ea typeface="Arial"/>
-                <a:cs typeface="Arial"/>
-              </a:rPr>
-              <a:t>Thank you for listening — questions are welcome</a:t>
-            </a:r>
-          </a:p>
-        </p:txBody>
-      </p:sp>
-    </p:spTree>
-  </p:cSld>
-  <p:clrMapOvr>
-    <a:masterClrMapping/>
-  </p:clrMapOvr>
-  <mc:AlternateContent xmlns:mc="http://schemas.openxmlformats.org/markup-compatibility/2006" xmlns:p14="http://schemas.microsoft.com/office/powerpoint/2010/main">
-    <mc:Choice Requires="p14">
-      <p:transition spd="med" p14:dur="700">
-        <p:fade/>
-      </p:transition>
-    </mc:Choice>
-    <mc:Fallback xmlns="">
-      <p:transition spd="med">
-        <p:fade/>
-      </p:transition>
-    </mc:Fallback>
-  </mc:AlternateContent>
-  <p:timing>
-    <p:tnLst>
-      <p:par>
-        <p:cTn id="1" dur="indefinite" restart="never" nodeType="tmRoot">
-          <p:childTnLst>
-            <p:seq concurrent="1" nextAc="seek">
-              <p:cTn id="2" dur="indefinite" nodeType="mainSeq">
-                <p:childTnLst>
-                  <p:par>
-                    <p:cTn id="3" fill="hold">
-                      <p:stCondLst>
-                        <p:cond delay="indefinite"/>
-                        <p:cond evt="onBegin" delay="0">
-                          <p:tn val="2"/>
-                        </p:cond>
-                      </p:stCondLst>
-                      <p:childTnLst>
-                        <p:par>
-                          <p:cTn id="4" fill="hold">
-                            <p:stCondLst>
-                              <p:cond delay="0"/>
-                            </p:stCondLst>
-                            <p:childTnLst>
-                              <p:par>
-                                <p:cTn id="5" presetID="22" presetClass="entr" presetSubtype="8" fill="hold" grpId="0" nodeType="withEffect">
-                                  <p:stCondLst>
-                                    <p:cond delay="0"/>
-                                  </p:stCondLst>
-                                  <p:childTnLst>
-                                    <p:set>
-                                      <p:cBhvr>
-                                        <p:cTn id="6" dur="1" fill="hold">
-                                          <p:stCondLst>
-                                            <p:cond delay="0"/>
-                                          </p:stCondLst>
-                                        </p:cTn>
-                                        <p:tgtEl>
-                                          <p:spTgt spid="3"/>
-                                        </p:tgtEl>
-                                        <p:attrNameLst>
-                                          <p:attrName>style.visibility</p:attrName>
-                                        </p:attrNameLst>
-                                      </p:cBhvr>
-                                      <p:to>
-                                        <p:strVal val="visible"/>
-                                      </p:to>
-                                    </p:set>
-                                    <p:animEffect transition="in" filter="wipe(left)">
-                                      <p:cBhvr>
-                                        <p:cTn id="7" dur="750"/>
-                                        <p:tgtEl>
-                                          <p:spTgt spid="3"/>
-                                        </p:tgtEl>
-                                      </p:cBhvr>
-                                    </p:animEffect>
-                                  </p:childTnLst>
-                                </p:cTn>
-                              </p:par>
-                            </p:childTnLst>
-                          </p:cTn>
-                        </p:par>
-                      </p:childTnLst>
-                    </p:cTn>
-                  </p:par>
-                </p:childTnLst>
-              </p:cTn>
-              <p:prevCondLst>
-                <p:cond evt="onPrev" delay="0">
-                  <p:tgtEl>
-                    <p:sldTgt/>
-                  </p:tgtEl>
-                </p:cond>
-              </p:prevCondLst>
-              <p:nextCondLst>
-                <p:cond evt="onNext" delay="0">
-                  <p:tgtEl>
-                    <p:sldTgt/>
-                  </p:tgtEl>
-                </p:cond>
-              </p:nextCondLst>
-            </p:seq>
-          </p:childTnLst>
-        </p:cTn>
-      </p:par>
-    </p:tnLst>
-    <p:bldLst>
-      <p:bldP spid="3" grpId="0"/>
-    </p:bldLst>
-  </p:timing>
-</p:sld>
-</file>
-
-<file path=ppt/slides/slide24.xml><?xml version="1.0" encoding="utf-8"?>
-<p:sld xmlns:a="http://schemas.openxmlformats.org/drawingml/2006/main" xmlns:r="http://schemas.openxmlformats.org/officeDocument/2006/relationships" xmlns:p="http://schemas.openxmlformats.org/presentationml/2006/main">
-  <p:cSld>
-    <p:spTree>
-      <p:nvGrpSpPr>
-        <p:cNvPr id="1" name="Shape 82"/>
-        <p:cNvGrpSpPr/>
-        <p:nvPr/>
-      </p:nvGrpSpPr>
-      <p:grpSpPr>
-        <a:xfrm>
-          <a:off x="0" y="0"/>
-          <a:ext cx="0" cy="0"/>
-          <a:chOff x="0" y="0"/>
-          <a:chExt cx="0" cy="0"/>
-        </a:xfrm>
-      </p:grpSpPr>
-    </p:spTree>
-  </p:cSld>
-  <p:clrMapOvr>
-    <a:masterClrMapping/>
-  </p:clrMapOvr>
-  <mc:AlternateContent xmlns:mc="http://schemas.openxmlformats.org/markup-compatibility/2006" xmlns:p14="http://schemas.microsoft.com/office/powerpoint/2010/main">
-    <mc:Choice Requires="p14">
-      <p:transition spd="med" p14:dur="700">
-        <p:fade/>
-      </p:transition>
-    </mc:Choice>
-    <mc:Fallback xmlns="">
-      <p:transition spd="med">
-        <p:fade/>
-      </p:transition>
-    </mc:Fallback>
-  </mc:AlternateContent>
 </p:sld>
 </file>
 
@@ -15561,6 +17032,497 @@
       <p:bldP spid="3" grpId="0"/>
     </p:bldLst>
   </p:timing>
+</p:sld>
+</file>
+
+<file path=ppt/slides/slide30.xml><?xml version="1.0" encoding="utf-8"?>
+<p:sld xmlns:a="http://schemas.openxmlformats.org/drawingml/2006/main" xmlns:r="http://schemas.openxmlformats.org/officeDocument/2006/relationships" xmlns:p="http://schemas.openxmlformats.org/presentationml/2006/main">
+  <p:cSld>
+    <p:spTree>
+      <p:nvGrpSpPr>
+        <p:cNvPr id="1" name=""/>
+        <p:cNvGrpSpPr/>
+        <p:nvPr/>
+      </p:nvGrpSpPr>
+      <p:grpSpPr>
+        <a:xfrm>
+          <a:off x="0" y="0"/>
+          <a:ext cx="0" cy="0"/>
+          <a:chOff x="0" y="0"/>
+          <a:chExt cx="0" cy="0"/>
+        </a:xfrm>
+      </p:grpSpPr>
+      <p:sp>
+        <p:nvSpPr>
+          <p:cNvPr id="2" name="Title"/>
+          <p:cNvSpPr/>
+          <p:nvPr/>
+        </p:nvSpPr>
+        <p:spPr>
+          <a:xfrm>
+            <a:off x="1200150" y="700000"/>
+            <a:ext cx="15887700" cy="900000"/>
+          </a:xfrm>
+          <a:prstGeom prst="rect">
+            <a:avLst/>
+          </a:prstGeom>
+          <a:noFill/>
+          <a:ln>
+            <a:noFill/>
+          </a:ln>
+        </p:spPr>
+        <p:txBody>
+          <a:bodyPr wrap="square" lIns="0" tIns="0" rIns="0" bIns="0" anchor="t">
+            <a:noAutofit/>
+          </a:bodyPr>
+          <a:lstStyle/>
+          <a:p>
+            <a:r>
+              <a:rPr lang="en-US" sz="4000" b="1" dirty="0">
+                <a:solidFill>
+                  <a:srgbClr val="193EB0"/>
+                </a:solidFill>
+                <a:latin typeface="Arial"/>
+                <a:ea typeface="Arial"/>
+                <a:cs typeface="Arial"/>
+              </a:rPr>
+              <a:t>Conclusion</a:t>
+            </a:r>
+          </a:p>
+        </p:txBody>
+      </p:sp>
+      <p:sp>
+        <p:nvSpPr>
+          <p:cNvPr id="3" name="Content"/>
+          <p:cNvSpPr/>
+          <p:nvPr/>
+        </p:nvSpPr>
+        <p:spPr>
+          <a:xfrm>
+            <a:off x="1187450" y="876300"/>
+            <a:ext cx="15887700" cy="7687000"/>
+          </a:xfrm>
+          <a:prstGeom prst="rect">
+            <a:avLst/>
+          </a:prstGeom>
+          <a:noFill/>
+          <a:ln>
+            <a:noFill/>
+          </a:ln>
+        </p:spPr>
+        <p:txBody>
+          <a:bodyPr wrap="square" lIns="0" tIns="0" rIns="0" bIns="0" anchor="ctr">
+            <a:normAutofit/>
+          </a:bodyPr>
+          <a:lstStyle/>
+          <a:p>
+            <a:pPr marL="457200" indent="-457200">
+              <a:spcAft>
+                <a:spcPts val="1600"/>
+              </a:spcAft>
+              <a:buClr>
+                <a:srgbClr val="193EB0"/>
+              </a:buClr>
+              <a:buFont typeface="Arial"/>
+              <a:buChar char="●"/>
+            </a:pPr>
+            <a:r>
+              <a:rPr lang="en-US" sz="3200" b="1" dirty="0"/>
+              <a:t>Successful Project Delivery:</a:t>
+            </a:r>
+            <a:r>
+              <a:rPr lang="en-US" sz="3200" dirty="0"/>
+              <a:t> The application successfully provides a comprehensive and reliable platform for workshop discovery and learning path planning, streamlining how users organize their educational journeys.</a:t>
+            </a:r>
+            <a:endParaRPr lang="ar-EG" sz="3200" dirty="0"/>
+          </a:p>
+          <a:p>
+            <a:pPr marL="457200" indent="-457200">
+              <a:spcAft>
+                <a:spcPts val="1600"/>
+              </a:spcAft>
+              <a:buClr>
+                <a:srgbClr val="193EB0"/>
+              </a:buClr>
+              <a:buFont typeface="Arial"/>
+              <a:buChar char="●"/>
+            </a:pPr>
+            <a:r>
+              <a:rPr lang="en-US" sz="3200" b="1" dirty="0"/>
+              <a:t>Practical Engineering Implementation:</a:t>
+            </a:r>
+            <a:r>
+              <a:rPr lang="en-US" sz="3200" dirty="0"/>
+              <a:t> The project successfully demonstrates the real-world value of Object-Oriented Programming (OOP) principles, manual sorting algorithms, and persistent data storage in building robust software.</a:t>
+            </a:r>
+            <a:endParaRPr lang="en-US" sz="3200" dirty="0">
+              <a:solidFill>
+                <a:srgbClr val="404040"/>
+              </a:solidFill>
+              <a:latin typeface="Arial"/>
+              <a:ea typeface="Arial"/>
+              <a:cs typeface="Arial"/>
+            </a:endParaRPr>
+          </a:p>
+        </p:txBody>
+      </p:sp>
+    </p:spTree>
+  </p:cSld>
+  <p:clrMapOvr>
+    <a:masterClrMapping/>
+  </p:clrMapOvr>
+  <mc:AlternateContent xmlns:mc="http://schemas.openxmlformats.org/markup-compatibility/2006" xmlns:p14="http://schemas.microsoft.com/office/powerpoint/2010/main">
+    <mc:Choice Requires="p14">
+      <p:transition spd="med" p14:dur="700">
+        <p:fade/>
+      </p:transition>
+    </mc:Choice>
+    <mc:Fallback xmlns="">
+      <p:transition spd="med">
+        <p:fade/>
+      </p:transition>
+    </mc:Fallback>
+  </mc:AlternateContent>
+  <p:timing>
+    <p:tnLst>
+      <p:par>
+        <p:cTn id="1" dur="indefinite" restart="never" nodeType="tmRoot">
+          <p:childTnLst>
+            <p:seq concurrent="1" nextAc="seek">
+              <p:cTn id="2" dur="indefinite" nodeType="mainSeq">
+                <p:childTnLst>
+                  <p:par>
+                    <p:cTn id="3" fill="hold">
+                      <p:stCondLst>
+                        <p:cond delay="indefinite"/>
+                        <p:cond evt="onBegin" delay="0">
+                          <p:tn val="2"/>
+                        </p:cond>
+                      </p:stCondLst>
+                      <p:childTnLst>
+                        <p:par>
+                          <p:cTn id="4" fill="hold">
+                            <p:stCondLst>
+                              <p:cond delay="0"/>
+                            </p:stCondLst>
+                            <p:childTnLst>
+                              <p:par>
+                                <p:cTn id="5" presetID="22" presetClass="entr" presetSubtype="1" fill="hold" grpId="0" nodeType="withEffect">
+                                  <p:stCondLst>
+                                    <p:cond delay="0"/>
+                                  </p:stCondLst>
+                                  <p:childTnLst>
+                                    <p:set>
+                                      <p:cBhvr>
+                                        <p:cTn id="6" dur="1" fill="hold">
+                                          <p:stCondLst>
+                                            <p:cond delay="0"/>
+                                          </p:stCondLst>
+                                        </p:cTn>
+                                        <p:tgtEl>
+                                          <p:spTgt spid="3"/>
+                                        </p:tgtEl>
+                                        <p:attrNameLst>
+                                          <p:attrName>style.visibility</p:attrName>
+                                        </p:attrNameLst>
+                                      </p:cBhvr>
+                                      <p:to>
+                                        <p:strVal val="visible"/>
+                                      </p:to>
+                                    </p:set>
+                                    <p:animEffect transition="in" filter="wipe(up)">
+                                      <p:cBhvr>
+                                        <p:cTn id="7" dur="1000"/>
+                                        <p:tgtEl>
+                                          <p:spTgt spid="3"/>
+                                        </p:tgtEl>
+                                      </p:cBhvr>
+                                    </p:animEffect>
+                                  </p:childTnLst>
+                                </p:cTn>
+                              </p:par>
+                            </p:childTnLst>
+                          </p:cTn>
+                        </p:par>
+                      </p:childTnLst>
+                    </p:cTn>
+                  </p:par>
+                </p:childTnLst>
+              </p:cTn>
+              <p:prevCondLst>
+                <p:cond evt="onPrev" delay="0">
+                  <p:tgtEl>
+                    <p:sldTgt/>
+                  </p:tgtEl>
+                </p:cond>
+              </p:prevCondLst>
+              <p:nextCondLst>
+                <p:cond evt="onNext" delay="0">
+                  <p:tgtEl>
+                    <p:sldTgt/>
+                  </p:tgtEl>
+                </p:cond>
+              </p:nextCondLst>
+            </p:seq>
+          </p:childTnLst>
+        </p:cTn>
+      </p:par>
+    </p:tnLst>
+    <p:bldLst>
+      <p:bldP spid="3" grpId="0"/>
+    </p:bldLst>
+  </p:timing>
+</p:sld>
+</file>
+
+<file path=ppt/slides/slide31.xml><?xml version="1.0" encoding="utf-8"?>
+<p:sld xmlns:a="http://schemas.openxmlformats.org/drawingml/2006/main" xmlns:r="http://schemas.openxmlformats.org/officeDocument/2006/relationships" xmlns:p="http://schemas.openxmlformats.org/presentationml/2006/main">
+  <p:cSld>
+    <p:spTree>
+      <p:nvGrpSpPr>
+        <p:cNvPr id="1" name=""/>
+        <p:cNvGrpSpPr/>
+        <p:nvPr/>
+      </p:nvGrpSpPr>
+      <p:grpSpPr>
+        <a:xfrm>
+          <a:off x="0" y="0"/>
+          <a:ext cx="0" cy="0"/>
+          <a:chOff x="0" y="0"/>
+          <a:chExt cx="0" cy="0"/>
+        </a:xfrm>
+      </p:grpSpPr>
+      <p:sp>
+        <p:nvSpPr>
+          <p:cNvPr id="2" name="Title"/>
+          <p:cNvSpPr/>
+          <p:nvPr/>
+        </p:nvSpPr>
+        <p:spPr>
+          <a:xfrm>
+            <a:off x="1200150" y="700000"/>
+            <a:ext cx="15887700" cy="900000"/>
+          </a:xfrm>
+          <a:prstGeom prst="rect">
+            <a:avLst/>
+          </a:prstGeom>
+          <a:noFill/>
+          <a:ln>
+            <a:noFill/>
+          </a:ln>
+        </p:spPr>
+        <p:txBody>
+          <a:bodyPr wrap="square" lIns="0" tIns="0" rIns="0" bIns="0" anchor="t">
+            <a:noAutofit/>
+          </a:bodyPr>
+          <a:lstStyle/>
+          <a:p>
+            <a:r>
+              <a:rPr lang="en-US" sz="5000" b="1" dirty="0">
+                <a:solidFill>
+                  <a:srgbClr val="193EB0"/>
+                </a:solidFill>
+                <a:latin typeface="Arial"/>
+                <a:ea typeface="Arial"/>
+                <a:cs typeface="Arial"/>
+              </a:rPr>
+              <a:t>Q&amp;A</a:t>
+            </a:r>
+          </a:p>
+        </p:txBody>
+      </p:sp>
+      <p:sp>
+        <p:nvSpPr>
+          <p:cNvPr id="3" name="Content"/>
+          <p:cNvSpPr/>
+          <p:nvPr/>
+        </p:nvSpPr>
+        <p:spPr>
+          <a:xfrm>
+            <a:off x="1200150" y="1900000"/>
+            <a:ext cx="15887700" cy="5119392"/>
+          </a:xfrm>
+          <a:prstGeom prst="rect">
+            <a:avLst/>
+          </a:prstGeom>
+          <a:noFill/>
+          <a:ln>
+            <a:noFill/>
+          </a:ln>
+        </p:spPr>
+        <p:txBody>
+          <a:bodyPr wrap="square" lIns="0" tIns="0" rIns="0" bIns="0" anchor="ctr">
+            <a:normAutofit/>
+          </a:bodyPr>
+          <a:lstStyle/>
+          <a:p>
+            <a:pPr marL="457200" indent="-457200">
+              <a:spcAft>
+                <a:spcPts val="1600"/>
+              </a:spcAft>
+              <a:buClr>
+                <a:srgbClr val="193EB0"/>
+              </a:buClr>
+              <a:buFont typeface="Arial"/>
+              <a:buChar char="●"/>
+            </a:pPr>
+            <a:r>
+              <a:rPr lang="en-US" sz="4000" dirty="0">
+                <a:solidFill>
+                  <a:srgbClr val="404040"/>
+                </a:solidFill>
+                <a:latin typeface="Arial"/>
+                <a:ea typeface="Arial"/>
+                <a:cs typeface="Arial"/>
+              </a:rPr>
+              <a:t>Thank you for listening — questions are welcome</a:t>
+            </a:r>
+          </a:p>
+        </p:txBody>
+      </p:sp>
+    </p:spTree>
+  </p:cSld>
+  <p:clrMapOvr>
+    <a:masterClrMapping/>
+  </p:clrMapOvr>
+  <mc:AlternateContent xmlns:mc="http://schemas.openxmlformats.org/markup-compatibility/2006" xmlns:p14="http://schemas.microsoft.com/office/powerpoint/2010/main">
+    <mc:Choice Requires="p14">
+      <p:transition spd="med" p14:dur="700">
+        <p:fade/>
+      </p:transition>
+    </mc:Choice>
+    <mc:Fallback xmlns="">
+      <p:transition spd="med">
+        <p:fade/>
+      </p:transition>
+    </mc:Fallback>
+  </mc:AlternateContent>
+  <p:timing>
+    <p:tnLst>
+      <p:par>
+        <p:cTn id="1" dur="indefinite" restart="never" nodeType="tmRoot">
+          <p:childTnLst>
+            <p:seq concurrent="1" nextAc="seek">
+              <p:cTn id="2" dur="indefinite" nodeType="mainSeq">
+                <p:childTnLst>
+                  <p:par>
+                    <p:cTn id="3" fill="hold">
+                      <p:stCondLst>
+                        <p:cond delay="indefinite"/>
+                        <p:cond evt="onBegin" delay="0">
+                          <p:tn val="2"/>
+                        </p:cond>
+                      </p:stCondLst>
+                      <p:childTnLst>
+                        <p:par>
+                          <p:cTn id="4" fill="hold">
+                            <p:stCondLst>
+                              <p:cond delay="0"/>
+                            </p:stCondLst>
+                            <p:childTnLst>
+                              <p:par>
+                                <p:cTn id="5" presetID="22" presetClass="entr" presetSubtype="8" fill="hold" grpId="0" nodeType="withEffect">
+                                  <p:stCondLst>
+                                    <p:cond delay="0"/>
+                                  </p:stCondLst>
+                                  <p:childTnLst>
+                                    <p:set>
+                                      <p:cBhvr>
+                                        <p:cTn id="6" dur="1" fill="hold">
+                                          <p:stCondLst>
+                                            <p:cond delay="0"/>
+                                          </p:stCondLst>
+                                        </p:cTn>
+                                        <p:tgtEl>
+                                          <p:spTgt spid="3"/>
+                                        </p:tgtEl>
+                                        <p:attrNameLst>
+                                          <p:attrName>style.visibility</p:attrName>
+                                        </p:attrNameLst>
+                                      </p:cBhvr>
+                                      <p:to>
+                                        <p:strVal val="visible"/>
+                                      </p:to>
+                                    </p:set>
+                                    <p:animEffect transition="in" filter="wipe(left)">
+                                      <p:cBhvr>
+                                        <p:cTn id="7" dur="750"/>
+                                        <p:tgtEl>
+                                          <p:spTgt spid="3"/>
+                                        </p:tgtEl>
+                                      </p:cBhvr>
+                                    </p:animEffect>
+                                  </p:childTnLst>
+                                </p:cTn>
+                              </p:par>
+                            </p:childTnLst>
+                          </p:cTn>
+                        </p:par>
+                      </p:childTnLst>
+                    </p:cTn>
+                  </p:par>
+                </p:childTnLst>
+              </p:cTn>
+              <p:prevCondLst>
+                <p:cond evt="onPrev" delay="0">
+                  <p:tgtEl>
+                    <p:sldTgt/>
+                  </p:tgtEl>
+                </p:cond>
+              </p:prevCondLst>
+              <p:nextCondLst>
+                <p:cond evt="onNext" delay="0">
+                  <p:tgtEl>
+                    <p:sldTgt/>
+                  </p:tgtEl>
+                </p:cond>
+              </p:nextCondLst>
+            </p:seq>
+          </p:childTnLst>
+        </p:cTn>
+      </p:par>
+    </p:tnLst>
+    <p:bldLst>
+      <p:bldP spid="3" grpId="0"/>
+    </p:bldLst>
+  </p:timing>
+</p:sld>
+</file>
+
+<file path=ppt/slides/slide32.xml><?xml version="1.0" encoding="utf-8"?>
+<p:sld xmlns:a="http://schemas.openxmlformats.org/drawingml/2006/main" xmlns:r="http://schemas.openxmlformats.org/officeDocument/2006/relationships" xmlns:p="http://schemas.openxmlformats.org/presentationml/2006/main">
+  <p:cSld>
+    <p:spTree>
+      <p:nvGrpSpPr>
+        <p:cNvPr id="1" name="Shape 82"/>
+        <p:cNvGrpSpPr/>
+        <p:nvPr/>
+      </p:nvGrpSpPr>
+      <p:grpSpPr>
+        <a:xfrm>
+          <a:off x="0" y="0"/>
+          <a:ext cx="0" cy="0"/>
+          <a:chOff x="0" y="0"/>
+          <a:chExt cx="0" cy="0"/>
+        </a:xfrm>
+      </p:grpSpPr>
+    </p:spTree>
+  </p:cSld>
+  <p:clrMapOvr>
+    <a:masterClrMapping/>
+  </p:clrMapOvr>
+  <mc:AlternateContent xmlns:mc="http://schemas.openxmlformats.org/markup-compatibility/2006" xmlns:p14="http://schemas.microsoft.com/office/powerpoint/2010/main">
+    <mc:Choice Requires="p14">
+      <p:transition spd="med" p14:dur="700">
+        <p:fade/>
+      </p:transition>
+    </mc:Choice>
+    <mc:Fallback xmlns="">
+      <p:transition spd="med">
+        <p:fade/>
+      </p:transition>
+    </mc:Fallback>
+  </mc:AlternateContent>
 </p:sld>
 </file>
 
@@ -17353,7 +19315,7 @@
         <p:spPr>
           <a:xfrm>
             <a:off x="1459078" y="2723791"/>
-            <a:ext cx="0" cy="5086709"/>
+            <a:ext cx="0" cy="4324709"/>
           </a:xfrm>
           <a:prstGeom prst="straightConnector1">
             <a:avLst/>
@@ -17437,7 +19399,7 @@
         <p:spPr>
           <a:xfrm>
             <a:off x="1905000" y="2723791"/>
-            <a:ext cx="14635382" cy="5262979"/>
+            <a:ext cx="14635382" cy="4524315"/>
           </a:xfrm>
           <a:prstGeom prst="rect">
             <a:avLst/>
@@ -17460,7 +19422,32 @@
                   <a:schemeClr val="bg1"/>
                 </a:solidFill>
               </a:rPr>
-              <a:t>Manual &amp; Inefficient Library Operations:</a:t>
+              <a:t>Fragmented Learning Opportunities: Learners and professionals struggle to discover, filter, and organize programming, AI, and design workshops in a single unified platform. </a:t>
+            </a:r>
+          </a:p>
+          <a:p>
+            <a:pPr marL="342900" indent="-342900">
+              <a:buFont typeface="Arial" panose="020B0604020202020204" pitchFamily="34" charset="0"/>
+              <a:buChar char="•"/>
+            </a:pPr>
+            <a:endParaRPr lang="en-US" sz="2400" b="1" dirty="0">
+              <a:solidFill>
+                <a:schemeClr val="bg1"/>
+              </a:solidFill>
+            </a:endParaRPr>
+          </a:p>
+          <a:p>
+            <a:pPr marL="342900" indent="-342900">
+              <a:buFont typeface="Arial" panose="020B0604020202020204" pitchFamily="34" charset="0"/>
+              <a:buChar char="•"/>
+            </a:pPr>
+            <a:r>
+              <a:rPr lang="en-US" sz="2400" b="1" dirty="0">
+                <a:solidFill>
+                  <a:schemeClr val="bg1"/>
+                </a:solidFill>
+              </a:rPr>
+              <a:t>Manual Calculation Inefficiencies:</a:t>
             </a:r>
             <a:r>
               <a:rPr lang="en-US" sz="2400" dirty="0">
@@ -17468,7 +19455,7 @@
                   <a:schemeClr val="bg1"/>
                 </a:solidFill>
               </a:rPr>
-              <a:t> Traditional library tracking systems rely on paper-based or unorganized methods, leading to inventory discrepancies, lost assets, and slow processing times.</a:t>
+              <a:t> Lack of automated mechanisms to accurately compute total registration fees, cumulative learning durations, and transportation costs across multiple selected events.</a:t>
             </a:r>
           </a:p>
           <a:p>
@@ -17493,7 +19480,7 @@
                   <a:schemeClr val="bg1"/>
                 </a:solidFill>
               </a:rPr>
-              <a:t>Lack of Role-Based Security:</a:t>
+              <a:t>Data Persistence &amp; Role Management Challenges:</a:t>
             </a:r>
             <a:r>
               <a:rPr lang="en-US" sz="2400" dirty="0">
@@ -17501,7 +19488,11 @@
                   <a:schemeClr val="bg1"/>
                 </a:solidFill>
               </a:rPr>
-              <a:t> Absence of proper access controls in basic systems, allowing unauthorized users to modify catalogs, add items, or bypass administrative restrictions.</a:t>
+              <a:t> The need for secure user authentication, distinct role segregation (Admin vs. User), and persistent JSON-based data storage to prevent information loss</a:t>
+            </a:r>
+            <a:r>
+              <a:rPr lang="en-US" sz="2400" dirty="0"/>
+              <a:t>.</a:t>
             </a:r>
           </a:p>
           <a:p>
@@ -17526,7 +19517,7 @@
                   <a:schemeClr val="bg1"/>
                 </a:solidFill>
               </a:rPr>
-              <a:t>Complex Borrowing &amp; Fine Management:</a:t>
+              <a:t>Navigation &amp; Search Overhead:</a:t>
             </a:r>
             <a:r>
               <a:rPr lang="en-US" sz="2400" dirty="0">
@@ -17534,74 +19525,15 @@
                   <a:schemeClr val="bg1"/>
                 </a:solidFill>
               </a:rPr>
-              <a:t> Difficulty in accurately tracking active borrowing cycles, due dates, and calculating late fees dynamically without administrative overhead.</a:t>
+              <a:t> The absence of structured data models like Stacks for page-history management and efficient manual sorting algorithms (Merge Sort) for quick price and rating evaluation. </a:t>
             </a:r>
           </a:p>
           <a:p>
-            <a:pPr marL="342900" indent="-342900">
-              <a:buFont typeface="Arial" panose="020B0604020202020204" pitchFamily="34" charset="0"/>
-              <a:buChar char="•"/>
-            </a:pPr>
             <a:endParaRPr lang="en-US" sz="2400" dirty="0">
               <a:solidFill>
                 <a:schemeClr val="bg1"/>
               </a:solidFill>
             </a:endParaRPr>
-          </a:p>
-          <a:p>
-            <a:pPr marL="342900" indent="-342900">
-              <a:buFont typeface="Arial" panose="020B0604020202020204" pitchFamily="34" charset="0"/>
-              <a:buChar char="•"/>
-            </a:pPr>
-            <a:r>
-              <a:rPr lang="en-US" sz="2400" b="1" dirty="0">
-                <a:solidFill>
-                  <a:schemeClr val="bg1"/>
-                </a:solidFill>
-              </a:rPr>
-              <a:t>Data Loss &amp; Lack of Persistence:</a:t>
-            </a:r>
-            <a:r>
-              <a:rPr lang="en-US" sz="2400" dirty="0">
-                <a:solidFill>
-                  <a:schemeClr val="bg1"/>
-                </a:solidFill>
-              </a:rPr>
-              <a:t> Many command-line or basic scripts fail to save state between sessions, resulting in lost user data, member registries, and inventory updates upon restart.</a:t>
-            </a:r>
-          </a:p>
-          <a:p>
-            <a:pPr marL="342900" indent="-342900">
-              <a:buFont typeface="Arial" panose="020B0604020202020204" pitchFamily="34" charset="0"/>
-              <a:buChar char="•"/>
-            </a:pPr>
-            <a:endParaRPr lang="en-US" sz="2400" dirty="0">
-              <a:solidFill>
-                <a:schemeClr val="bg1"/>
-              </a:solidFill>
-            </a:endParaRPr>
-          </a:p>
-          <a:p>
-            <a:pPr marL="342900" indent="-342900">
-              <a:buFont typeface="Arial" panose="020B0604020202020204" pitchFamily="34" charset="0"/>
-              <a:buChar char="•"/>
-            </a:pPr>
-            <a:r>
-              <a:rPr lang="en-US" sz="2400" b="1" dirty="0">
-                <a:solidFill>
-                  <a:schemeClr val="bg1"/>
-                </a:solidFill>
-              </a:rPr>
-              <a:t>Poor User Experience &amp; Fragile Inputs:</a:t>
-            </a:r>
-            <a:r>
-              <a:rPr lang="en-US" sz="2400" dirty="0">
-                <a:solidFill>
-                  <a:schemeClr val="bg1"/>
-                </a:solidFill>
-              </a:rPr>
-              <a:t> Command-line interfaces that easily crash due to invalid user credentials, incorrect email formats, or unhandled exceptions during navigation.</a:t>
-            </a:r>
           </a:p>
         </p:txBody>
       </p:sp>
@@ -19688,7 +21620,7 @@
         <p:spPr>
           <a:xfrm>
             <a:off x="2971800" y="2933700"/>
-            <a:ext cx="12525789" cy="5262979"/>
+            <a:ext cx="12525789" cy="5632311"/>
           </a:xfrm>
           <a:prstGeom prst="rect">
             <a:avLst/>
@@ -19711,7 +21643,7 @@
                   <a:schemeClr val="bg1"/>
                 </a:solidFill>
               </a:rPr>
-              <a:t>System Purpose</a:t>
+              <a:t>System Overview:</a:t>
             </a:r>
             <a:r>
               <a:rPr lang="en-US" sz="2400" dirty="0">
@@ -19719,7 +21651,23 @@
                   <a:schemeClr val="bg1"/>
                 </a:solidFill>
               </a:rPr>
-              <a:t>: A robust command-line application built in Python to digitize and automate core library operations, inventory tracking, and member management.</a:t>
+              <a:t> Developed the </a:t>
+            </a:r>
+            <a:r>
+              <a:rPr lang="en-US" sz="2400" b="1" dirty="0">
+                <a:solidFill>
+                  <a:schemeClr val="bg1"/>
+                </a:solidFill>
+              </a:rPr>
+              <a:t>Workshops &amp; Learning Events Planner</a:t>
+            </a:r>
+            <a:r>
+              <a:rPr lang="en-US" sz="2400" dirty="0">
+                <a:solidFill>
+                  <a:schemeClr val="bg1"/>
+                </a:solidFill>
+              </a:rPr>
+              <a:t> as a comprehensive Python application designed to help users discover, filter, and organize educational events across categories like Programming, AI, and Design.</a:t>
             </a:r>
           </a:p>
           <a:p>
@@ -19744,7 +21692,7 @@
                   <a:schemeClr val="bg1"/>
                 </a:solidFill>
               </a:rPr>
-              <a:t>Inventory Scope</a:t>
+              <a:t>Core Functionalities:</a:t>
             </a:r>
             <a:r>
               <a:rPr lang="en-US" sz="2400" dirty="0">
@@ -19752,7 +21700,7 @@
                   <a:schemeClr val="bg1"/>
                 </a:solidFill>
               </a:rPr>
-              <a:t>: Manages diverse library assets including Books, Magazines, and Digital Resources through an extensible object-oriented hierarchy.</a:t>
+              <a:t> Enables users to manage personalized learning plans, search events by name or trainer, and evaluate options through manual sorting and calculations.</a:t>
             </a:r>
           </a:p>
           <a:p>
@@ -19777,7 +21725,7 @@
                   <a:schemeClr val="bg1"/>
                 </a:solidFill>
               </a:rPr>
-              <a:t>Access Control</a:t>
+              <a:t>Architecture &amp; Data Management:</a:t>
             </a:r>
             <a:r>
               <a:rPr lang="en-US" sz="2400" dirty="0">
@@ -19785,7 +21733,45 @@
                   <a:schemeClr val="bg1"/>
                 </a:solidFill>
               </a:rPr>
-              <a:t>: Implements Role-Based Access Control (RBAC) separating administrative privileges (catalog management) from customer workflows (borrowing and returning).</a:t>
+              <a:t> Built using Object-Oriented Programming (OOP) principles, featuring persistent JSON storage for events and users, alongside role-based access control for Admins and standard Users.</a:t>
+            </a:r>
+            <a:endParaRPr lang="ar-EG" sz="2400" dirty="0">
+              <a:solidFill>
+                <a:schemeClr val="bg1"/>
+              </a:solidFill>
+            </a:endParaRPr>
+          </a:p>
+          <a:p>
+            <a:pPr marL="285750" indent="-285750">
+              <a:buFont typeface="Arial" panose="020B0604020202020204" pitchFamily="34" charset="0"/>
+              <a:buChar char="•"/>
+            </a:pPr>
+            <a:endParaRPr lang="ar-EG" sz="2400" dirty="0">
+              <a:solidFill>
+                <a:schemeClr val="bg1"/>
+              </a:solidFill>
+            </a:endParaRPr>
+          </a:p>
+          <a:p>
+            <a:pPr marL="285750" indent="-285750">
+              <a:buFont typeface="Arial" panose="020B0604020202020204" pitchFamily="34" charset="0"/>
+              <a:buChar char="•"/>
+            </a:pPr>
+            <a:r>
+              <a:rPr lang="en-US" sz="2400" b="1" dirty="0">
+                <a:solidFill>
+                  <a:schemeClr val="bg1"/>
+                </a:solidFill>
+              </a:rPr>
+              <a:t>Financial &amp; Duration Calculations:</a:t>
+            </a:r>
+            <a:r>
+              <a:rPr lang="en-US" sz="2400" dirty="0">
+                <a:solidFill>
+                  <a:schemeClr val="bg1"/>
+                </a:solidFill>
+              </a:rPr>
+              <a:t> Integrates robust summary functions to compute total registration fees, cumulative learning durations, and associated costs for the user's plan. </a:t>
             </a:r>
           </a:p>
           <a:p>
@@ -19804,55 +21790,11 @@
               <a:buFont typeface="Arial" panose="020B0604020202020204" pitchFamily="34" charset="0"/>
               <a:buChar char="•"/>
             </a:pPr>
-            <a:r>
-              <a:rPr lang="en-US" sz="2400" b="1" dirty="0">
-                <a:solidFill>
-                  <a:schemeClr val="bg1"/>
-                </a:solidFill>
-              </a:rPr>
-              <a:t>Core Workflows</a:t>
-            </a:r>
-            <a:r>
-              <a:rPr lang="en-US" sz="2400" dirty="0">
-                <a:solidFill>
-                  <a:schemeClr val="bg1"/>
-                </a:solidFill>
-              </a:rPr>
-              <a:t>: Automates user registration with strict validations, secure session management, item lending cycles, and dynamic late-fee calculations.</a:t>
-            </a:r>
-          </a:p>
-          <a:p>
-            <a:pPr marL="285750" indent="-285750">
-              <a:buFont typeface="Arial" panose="020B0604020202020204" pitchFamily="34" charset="0"/>
-              <a:buChar char="•"/>
-            </a:pPr>
             <a:endParaRPr lang="en-US" sz="2400" dirty="0">
               <a:solidFill>
                 <a:schemeClr val="bg1"/>
               </a:solidFill>
             </a:endParaRPr>
-          </a:p>
-          <a:p>
-            <a:pPr marL="285750" indent="-285750">
-              <a:buFont typeface="Arial" panose="020B0604020202020204" pitchFamily="34" charset="0"/>
-              <a:buChar char="•"/>
-            </a:pPr>
-            <a:r>
-              <a:rPr lang="en-US" sz="2400" b="1" dirty="0">
-                <a:solidFill>
-                  <a:schemeClr val="bg1"/>
-                </a:solidFill>
-              </a:rPr>
-              <a:t>Data Persistence</a:t>
-            </a:r>
-            <a:r>
-              <a:rPr lang="en-US" sz="2400" dirty="0">
-                <a:solidFill>
-                  <a:schemeClr val="bg1"/>
-                </a:solidFill>
-              </a:rPr>
-              <a:t>: Ensures seamless data retention and state recovery across sessions using a local JSON-based database architecture.</a:t>
-            </a:r>
           </a:p>
         </p:txBody>
       </p:sp>
@@ -21863,7 +23805,7 @@
         <p:spPr>
           <a:xfrm>
             <a:off x="1447800" y="2392467"/>
-            <a:ext cx="0" cy="6180033"/>
+            <a:ext cx="0" cy="5632311"/>
           </a:xfrm>
           <a:prstGeom prst="straightConnector1">
             <a:avLst/>
@@ -21895,7 +23837,7 @@
         <p:spPr>
           <a:xfrm>
             <a:off x="1905000" y="2392467"/>
-            <a:ext cx="15086785" cy="6370975"/>
+            <a:ext cx="15086785" cy="5632311"/>
           </a:xfrm>
           <a:prstGeom prst="rect">
             <a:avLst/>
@@ -21908,7 +23850,140 @@
           </a:bodyPr>
           <a:lstStyle/>
           <a:p>
+            <a:endParaRPr lang="en-US" sz="2400" dirty="0">
+              <a:solidFill>
+                <a:schemeClr val="bg1"/>
+              </a:solidFill>
+            </a:endParaRPr>
+          </a:p>
+          <a:p>
             <a:pPr marL="342900" indent="-342900">
+              <a:buFont typeface="Arial" panose="020B0604020202020204" pitchFamily="34" charset="0"/>
+              <a:buChar char="•"/>
+            </a:pPr>
+            <a:r>
+              <a:rPr lang="en-US" altLang="en-US" sz="2400" dirty="0">
+                <a:solidFill>
+                  <a:schemeClr val="bg1"/>
+                </a:solidFill>
+              </a:rPr>
+              <a:t>Object-Oriented Programming (OOP) Design: Structured the system architecture using class-based modeling (e.g., Event, </a:t>
+            </a:r>
+            <a:r>
+              <a:rPr lang="en-US" altLang="en-US" sz="2400" dirty="0" err="1">
+                <a:solidFill>
+                  <a:schemeClr val="bg1"/>
+                </a:solidFill>
+              </a:rPr>
+              <a:t>EventManager</a:t>
+            </a:r>
+            <a:r>
+              <a:rPr lang="en-US" altLang="en-US" sz="2400" dirty="0">
+                <a:solidFill>
+                  <a:schemeClr val="bg1"/>
+                </a:solidFill>
+              </a:rPr>
+              <a:t>, </a:t>
+            </a:r>
+            <a:r>
+              <a:rPr lang="en-US" altLang="en-US" sz="2400" dirty="0" err="1">
+                <a:solidFill>
+                  <a:schemeClr val="bg1"/>
+                </a:solidFill>
+              </a:rPr>
+              <a:t>LearningPlan</a:t>
+            </a:r>
+            <a:r>
+              <a:rPr lang="en-US" altLang="en-US" sz="2400" dirty="0">
+                <a:solidFill>
+                  <a:schemeClr val="bg1"/>
+                </a:solidFill>
+              </a:rPr>
+              <a:t>) to promote modularity and clean code. </a:t>
+            </a:r>
+          </a:p>
+          <a:p>
+            <a:pPr marL="342900" indent="-342900">
+              <a:buFont typeface="Arial" panose="020B0604020202020204" pitchFamily="34" charset="0"/>
+              <a:buChar char="•"/>
+            </a:pPr>
+            <a:endParaRPr lang="en-US" altLang="en-US" sz="2400" dirty="0">
+              <a:solidFill>
+                <a:schemeClr val="bg1"/>
+              </a:solidFill>
+            </a:endParaRPr>
+          </a:p>
+          <a:p>
+            <a:pPr marL="342900" lvl="0" indent="-342900" eaLnBrk="0" fontAlgn="base" hangingPunct="0">
+              <a:spcBef>
+                <a:spcPct val="0"/>
+              </a:spcBef>
+              <a:spcAft>
+                <a:spcPct val="0"/>
+              </a:spcAft>
+              <a:buFont typeface="Arial" panose="020B0604020202020204" pitchFamily="34" charset="0"/>
+              <a:buChar char="•"/>
+            </a:pPr>
+            <a:r>
+              <a:rPr lang="en-US" altLang="en-US" sz="2400" dirty="0">
+                <a:solidFill>
+                  <a:schemeClr val="bg1"/>
+                </a:solidFill>
+              </a:rPr>
+              <a:t>Persistent Data Storage: Implemented local JSON-based serialization and deserialization (</a:t>
+            </a:r>
+            <a:r>
+              <a:rPr lang="en-US" altLang="en-US" sz="2400" dirty="0" err="1">
+                <a:solidFill>
+                  <a:schemeClr val="bg1"/>
+                </a:solidFill>
+              </a:rPr>
+              <a:t>events.json</a:t>
+            </a:r>
+            <a:r>
+              <a:rPr lang="en-US" altLang="en-US" sz="2400" dirty="0">
+                <a:solidFill>
+                  <a:schemeClr val="bg1"/>
+                </a:solidFill>
+              </a:rPr>
+              <a:t>, </a:t>
+            </a:r>
+            <a:r>
+              <a:rPr lang="en-US" altLang="en-US" sz="2400" dirty="0" err="1">
+                <a:solidFill>
+                  <a:schemeClr val="bg1"/>
+                </a:solidFill>
+              </a:rPr>
+              <a:t>users.json</a:t>
+            </a:r>
+            <a:r>
+              <a:rPr lang="en-US" altLang="en-US" sz="2400" dirty="0">
+                <a:solidFill>
+                  <a:schemeClr val="bg1"/>
+                </a:solidFill>
+              </a:rPr>
+              <a:t>) to maintain state and ensure data persistence across sessions. </a:t>
+            </a:r>
+          </a:p>
+          <a:p>
+            <a:pPr marL="342900" indent="-342900">
+              <a:buFont typeface="Arial" panose="020B0604020202020204" pitchFamily="34" charset="0"/>
+              <a:buChar char="•"/>
+            </a:pPr>
+            <a:endParaRPr lang="ar-EG" sz="2400" dirty="0">
+              <a:solidFill>
+                <a:schemeClr val="bg1"/>
+              </a:solidFill>
+            </a:endParaRPr>
+          </a:p>
+          <a:p>
+            <a:pPr indent="-342900" eaLnBrk="0" fontAlgn="base" hangingPunct="0">
+              <a:spcBef>
+                <a:spcPct val="0"/>
+              </a:spcBef>
+              <a:spcAft>
+                <a:spcPct val="0"/>
+              </a:spcAft>
               <a:buFont typeface="Arial" panose="020B0604020202020204" pitchFamily="34" charset="0"/>
               <a:buChar char="•"/>
             </a:pPr>
@@ -21918,45 +23993,51 @@
                   <a:schemeClr val="bg1"/>
                 </a:solidFill>
               </a:rPr>
-              <a:t>Object-Oriented Programming (OOP): Designed with a robust class hierarchy, featuring a base </a:t>
+              <a:t>Authentication &amp; Role-Based Access Control: Developed robust input validation routines and access control measures to separate permissions between regular users and system administrators.</a:t>
             </a:r>
-            <a:r>
-              <a:rPr lang="en-US" sz="2400" dirty="0" err="1">
-                <a:solidFill>
-                  <a:schemeClr val="bg1"/>
-                </a:solidFill>
-              </a:rPr>
-              <a:t>LibraryItem</a:t>
-            </a:r>
-            <a:r>
-              <a:rPr lang="en-US" sz="2400" dirty="0">
-                <a:solidFill>
-                  <a:schemeClr val="bg1"/>
-                </a:solidFill>
-              </a:rPr>
-              <a:t> class and extended subclasses (Book, Magazine, </a:t>
-            </a:r>
-            <a:r>
-              <a:rPr lang="en-US" sz="2400" dirty="0" err="1">
-                <a:solidFill>
-                  <a:schemeClr val="bg1"/>
-                </a:solidFill>
-              </a:rPr>
-              <a:t>DigitalResource</a:t>
-            </a:r>
-            <a:r>
-              <a:rPr lang="en-US" sz="2400" dirty="0">
-                <a:solidFill>
-                  <a:schemeClr val="bg1"/>
-                </a:solidFill>
-              </a:rPr>
-              <a:t>) utilizing inheritance, encapsulation, and polymorphism.</a:t>
-            </a:r>
+          </a:p>
+          <a:p>
             <a:endParaRPr lang="ar-EG" sz="2400" dirty="0">
               <a:solidFill>
                 <a:schemeClr val="bg1"/>
               </a:solidFill>
             </a:endParaRPr>
+          </a:p>
+          <a:p>
+            <a:pPr marL="342900" lvl="0" indent="-342900" eaLnBrk="0" fontAlgn="base" hangingPunct="0">
+              <a:spcBef>
+                <a:spcPct val="0"/>
+              </a:spcBef>
+              <a:spcAft>
+                <a:spcPct val="0"/>
+              </a:spcAft>
+              <a:buFont typeface="Arial" panose="020B0604020202020204" pitchFamily="34" charset="0"/>
+              <a:buChar char="•"/>
+            </a:pPr>
+            <a:r>
+              <a:rPr lang="en-US" altLang="en-US" sz="2400" dirty="0">
+                <a:solidFill>
+                  <a:schemeClr val="bg1"/>
+                </a:solidFill>
+              </a:rPr>
+              <a:t>Manual Algorithmic Sorting: Integrated a custom Divide-and-Conquer </a:t>
+            </a:r>
+            <a:r>
+              <a:rPr lang="en-US" altLang="en-US" sz="2400" dirty="0" err="1">
+                <a:solidFill>
+                  <a:schemeClr val="bg1"/>
+                </a:solidFill>
+              </a:rPr>
+              <a:t>MergeSort</a:t>
+            </a:r>
+            <a:r>
+              <a:rPr lang="en-US" altLang="en-US" sz="2400" dirty="0">
+                <a:solidFill>
+                  <a:schemeClr val="bg1"/>
+                </a:solidFill>
+              </a:rPr>
+              <a:t> algorithm to manually organize events by price or rating without relying on built-in sorting functions. </a:t>
+            </a:r>
           </a:p>
           <a:p>
             <a:pPr marL="342900" indent="-342900">
@@ -21975,20 +24056,12 @@
               <a:buChar char="•"/>
             </a:pPr>
             <a:r>
-              <a:rPr lang="en-US" sz="2400" dirty="0">
+              <a:rPr lang="en-US" sz="2400" b="1" dirty="0">
                 <a:solidFill>
                   <a:schemeClr val="bg1"/>
                 </a:solidFill>
               </a:rPr>
-              <a:t>Functional Programming &amp; Closures: Implemented a custom closure (</a:t>
-            </a:r>
-            <a:r>
-              <a:rPr lang="en-US" sz="2400" dirty="0" err="1">
-                <a:solidFill>
-                  <a:schemeClr val="bg1"/>
-                </a:solidFill>
-              </a:rPr>
-              <a:t>late_fee_calculator</a:t>
+              <a:t>Recursive Summary Computation:</a:t>
             </a:r>
             <a:r>
               <a:rPr lang="en-US" sz="2400" dirty="0">
@@ -21996,191 +24069,7 @@
                   <a:schemeClr val="bg1"/>
                 </a:solidFill>
               </a:rPr>
-              <a:t>) to encapsulate state and handle dynamic fine calculations efficiently (5 EGP per overdue day).</a:t>
-            </a:r>
-            <a:endParaRPr lang="ar-EG" sz="2400" dirty="0">
-              <a:solidFill>
-                <a:schemeClr val="bg1"/>
-              </a:solidFill>
-            </a:endParaRPr>
-          </a:p>
-          <a:p>
-            <a:pPr marL="342900" indent="-342900">
-              <a:buFont typeface="Arial" panose="020B0604020202020204" pitchFamily="34" charset="0"/>
-              <a:buChar char="•"/>
-            </a:pPr>
-            <a:endParaRPr lang="ar-EG" sz="2400" dirty="0">
-              <a:solidFill>
-                <a:schemeClr val="bg1"/>
-              </a:solidFill>
-            </a:endParaRPr>
-          </a:p>
-          <a:p>
-            <a:pPr marL="342900" indent="-342900">
-              <a:buFont typeface="Arial" panose="020B0604020202020204" pitchFamily="34" charset="0"/>
-              <a:buChar char="•"/>
-            </a:pPr>
-            <a:r>
-              <a:rPr lang="en-US" sz="2400" dirty="0">
-                <a:solidFill>
-                  <a:schemeClr val="bg1"/>
-                </a:solidFill>
-              </a:rPr>
-              <a:t>Input Validation &amp; Security (Regex): Integrated strict validation loops using Regular Expressions (re module) to ensure secure email syntax, valid names, and secure password constraints with multi-try mechanics.</a:t>
-            </a:r>
-            <a:endParaRPr lang="ar-EG" sz="2400" dirty="0">
-              <a:solidFill>
-                <a:schemeClr val="bg1"/>
-              </a:solidFill>
-            </a:endParaRPr>
-          </a:p>
-          <a:p>
-            <a:pPr marL="342900" indent="-342900">
-              <a:buFont typeface="Arial" panose="020B0604020202020204" pitchFamily="34" charset="0"/>
-              <a:buChar char="•"/>
-            </a:pPr>
-            <a:endParaRPr lang="ar-EG" sz="2400" dirty="0">
-              <a:solidFill>
-                <a:schemeClr val="bg1"/>
-              </a:solidFill>
-            </a:endParaRPr>
-          </a:p>
-          <a:p>
-            <a:pPr marL="342900" indent="-342900">
-              <a:buFont typeface="Arial" panose="020B0604020202020204" pitchFamily="34" charset="0"/>
-              <a:buChar char="•"/>
-            </a:pPr>
-            <a:r>
-              <a:rPr lang="en-US" sz="2400" dirty="0">
-                <a:solidFill>
-                  <a:schemeClr val="bg1"/>
-                </a:solidFill>
-              </a:rPr>
-              <a:t>Memory-Efficient Iteration: Utilized Python iterators and generators (</a:t>
-            </a:r>
-            <a:r>
-              <a:rPr lang="en-US" sz="2400" dirty="0" err="1">
-                <a:solidFill>
-                  <a:schemeClr val="bg1"/>
-                </a:solidFill>
-              </a:rPr>
-              <a:t>iter</a:t>
-            </a:r>
-            <a:r>
-              <a:rPr lang="en-US" sz="2400" dirty="0">
-                <a:solidFill>
-                  <a:schemeClr val="bg1"/>
-                </a:solidFill>
-              </a:rPr>
-              <a:t>(), next(), </a:t>
-            </a:r>
-            <a:r>
-              <a:rPr lang="en-US" sz="2400" dirty="0" err="1">
-                <a:solidFill>
-                  <a:schemeClr val="bg1"/>
-                </a:solidFill>
-              </a:rPr>
-              <a:t>StopIteration</a:t>
-            </a:r>
-            <a:r>
-              <a:rPr lang="en-US" sz="2400" dirty="0">
-                <a:solidFill>
-                  <a:schemeClr val="bg1"/>
-                </a:solidFill>
-              </a:rPr>
-              <a:t>) to handle catalog filtering and available items smoothly without memory overhead.</a:t>
-            </a:r>
-            <a:endParaRPr lang="ar-EG" sz="2400" dirty="0">
-              <a:solidFill>
-                <a:schemeClr val="bg1"/>
-              </a:solidFill>
-            </a:endParaRPr>
-          </a:p>
-          <a:p>
-            <a:pPr marL="342900" indent="-342900">
-              <a:buFont typeface="Arial" panose="020B0604020202020204" pitchFamily="34" charset="0"/>
-              <a:buChar char="•"/>
-            </a:pPr>
-            <a:endParaRPr lang="ar-EG" sz="2400" dirty="0">
-              <a:solidFill>
-                <a:schemeClr val="bg1"/>
-              </a:solidFill>
-            </a:endParaRPr>
-          </a:p>
-          <a:p>
-            <a:pPr marL="342900" indent="-342900">
-              <a:buFont typeface="Arial" panose="020B0604020202020204" pitchFamily="34" charset="0"/>
-              <a:buChar char="•"/>
-            </a:pPr>
-            <a:r>
-              <a:rPr lang="en-US" sz="2400" dirty="0">
-                <a:solidFill>
-                  <a:schemeClr val="bg1"/>
-                </a:solidFill>
-              </a:rPr>
-              <a:t>Data Persistence &amp; JSON Architecture: Built an automated serialization and deserialization engine to sync runtime object states with a local persistent JSON database (</a:t>
-            </a:r>
-            <a:r>
-              <a:rPr lang="en-US" sz="2400" dirty="0" err="1">
-                <a:solidFill>
-                  <a:schemeClr val="bg1"/>
-                </a:solidFill>
-              </a:rPr>
-              <a:t>library_system.json</a:t>
-            </a:r>
-            <a:r>
-              <a:rPr lang="en-US" sz="2400" dirty="0">
-                <a:solidFill>
-                  <a:schemeClr val="bg1"/>
-                </a:solidFill>
-              </a:rPr>
-              <a:t>).</a:t>
-            </a:r>
-            <a:endParaRPr lang="ar-EG" sz="2400" dirty="0">
-              <a:solidFill>
-                <a:schemeClr val="bg1"/>
-              </a:solidFill>
-            </a:endParaRPr>
-          </a:p>
-          <a:p>
-            <a:pPr marL="342900" indent="-342900">
-              <a:buFont typeface="Arial" panose="020B0604020202020204" pitchFamily="34" charset="0"/>
-              <a:buChar char="•"/>
-            </a:pPr>
-            <a:endParaRPr lang="ar-EG" sz="2400" dirty="0">
-              <a:solidFill>
-                <a:schemeClr val="bg1"/>
-              </a:solidFill>
-            </a:endParaRPr>
-          </a:p>
-          <a:p>
-            <a:pPr marL="342900" indent="-342900">
-              <a:buFont typeface="Arial" panose="020B0604020202020204" pitchFamily="34" charset="0"/>
-              <a:buChar char="•"/>
-            </a:pPr>
-            <a:r>
-              <a:rPr lang="en-US" sz="2400" dirty="0">
-                <a:solidFill>
-                  <a:schemeClr val="bg1"/>
-                </a:solidFill>
-              </a:rPr>
-              <a:t>Enhanced User Experience (UX): Powered the terminal interface with ANSI color codes via </a:t>
-            </a:r>
-            <a:r>
-              <a:rPr lang="en-US" sz="2400" dirty="0" err="1">
-                <a:solidFill>
-                  <a:schemeClr val="bg1"/>
-                </a:solidFill>
-              </a:rPr>
-              <a:t>colorama</a:t>
-            </a:r>
-            <a:r>
-              <a:rPr lang="en-US" sz="2400" dirty="0">
-                <a:solidFill>
-                  <a:schemeClr val="bg1"/>
-                </a:solidFill>
-              </a:rPr>
-              <a:t> to deliver clear, color-coded status alerts, error warnings, and a polished CLI experience.</a:t>
+              <a:t> Built recursive calculation functions within the learning plan logic to compute cumulative event fees and total learning hours efficiently.</a:t>
             </a:r>
           </a:p>
         </p:txBody>
